--- a/CostVision-CAPEE-Implementation-Options.pptx
+++ b/CostVision-CAPEE-Implementation-Options.pptx
@@ -5794,7 +5794,7 @@
             <a:r>
               <a:rPr sz="750" b="0" i="0">
                 <a:solidFill>
-                  <a:srgbClr val="6B7280"/>
+                  <a:srgbClr val="686F7D"/>
                 </a:solidFill>
                 <a:latin typeface="Calibri"/>
               </a:rPr>
@@ -6660,7 +6660,7 @@
             <a:r>
               <a:rPr sz="1030" b="1" i="0">
                 <a:solidFill>
-                  <a:srgbClr val="2E8B57"/>
+                  <a:srgbClr val="2A7F50"/>
                 </a:solidFill>
                 <a:latin typeface="Calibri"/>
               </a:rPr>
@@ -7012,7 +7012,7 @@
             <a:r>
               <a:rPr sz="1030" b="1" i="0">
                 <a:solidFill>
-                  <a:srgbClr val="B7791F"/>
+                  <a:srgbClr val="99651A"/>
                 </a:solidFill>
                 <a:latin typeface="Calibri"/>
               </a:rPr>
@@ -7364,7 +7364,7 @@
             <a:r>
               <a:rPr sz="1030" b="1" i="0">
                 <a:solidFill>
-                  <a:srgbClr val="2E8B57"/>
+                  <a:srgbClr val="2A7F50"/>
                 </a:solidFill>
                 <a:latin typeface="Calibri"/>
               </a:rPr>
@@ -7608,7 +7608,7 @@
             <a:avLst/>
           </a:prstGeom>
           <a:solidFill>
-            <a:srgbClr val="B7791F"/>
+            <a:srgbClr val="99651A"/>
           </a:solidFill>
           <a:ln>
             <a:noFill/>
@@ -7670,7 +7670,7 @@
             <a:r>
               <a:rPr sz="1200" b="1" i="0">
                 <a:solidFill>
-                  <a:srgbClr val="B7791F"/>
+                  <a:srgbClr val="99651A"/>
                 </a:solidFill>
                 <a:latin typeface="Calibri"/>
               </a:rPr>
@@ -7754,7 +7754,7 @@
             <a:r>
               <a:rPr sz="800" b="0" i="0">
                 <a:solidFill>
-                  <a:srgbClr val="6B7280"/>
+                  <a:srgbClr val="686F7D"/>
                 </a:solidFill>
                 <a:latin typeface="Calibri"/>
               </a:rPr>
@@ -7955,7 +7955,7 @@
             <a:r>
               <a:rPr sz="750" b="0" i="0">
                 <a:solidFill>
-                  <a:srgbClr val="6B7280"/>
+                  <a:srgbClr val="686F7D"/>
                 </a:solidFill>
                 <a:latin typeface="Calibri"/>
               </a:rPr>
@@ -8197,7 +8197,7 @@
             <a:avLst/>
           </a:prstGeom>
           <a:solidFill>
-            <a:srgbClr val="2E8B57"/>
+            <a:srgbClr val="2A7F50"/>
           </a:solidFill>
           <a:ln>
             <a:noFill/>
@@ -8241,7 +8241,7 @@
             <a:avLst/>
           </a:prstGeom>
           <a:solidFill>
-            <a:srgbClr val="2E8B57"/>
+            <a:srgbClr val="2A7F50"/>
           </a:solidFill>
           <a:ln>
             <a:noFill/>
@@ -8884,7 +8884,7 @@
             <a:avLst/>
           </a:prstGeom>
           <a:solidFill>
-            <a:srgbClr val="B7791F"/>
+            <a:srgbClr val="99651A"/>
           </a:solidFill>
           <a:ln>
             <a:noFill/>
@@ -8928,7 +8928,7 @@
             <a:avLst/>
           </a:prstGeom>
           <a:solidFill>
-            <a:srgbClr val="B7791F"/>
+            <a:srgbClr val="99651A"/>
           </a:solidFill>
           <a:ln>
             <a:noFill/>
@@ -9111,7 +9111,7 @@
             <a:avLst/>
           </a:prstGeom>
           <a:solidFill>
-            <a:srgbClr val="2E8B57"/>
+            <a:srgbClr val="2A7F50"/>
           </a:solidFill>
           <a:ln>
             <a:noFill/>
@@ -9173,7 +9173,7 @@
             <a:r>
               <a:rPr sz="1200" b="1" i="0">
                 <a:solidFill>
-                  <a:srgbClr val="2E8B57"/>
+                  <a:srgbClr val="2A7F50"/>
                 </a:solidFill>
                 <a:latin typeface="Calibri"/>
               </a:rPr>
@@ -9416,7 +9416,7 @@
             <a:r>
               <a:rPr sz="750" b="0" i="0">
                 <a:solidFill>
-                  <a:srgbClr val="6B7280"/>
+                  <a:srgbClr val="686F7D"/>
                 </a:solidFill>
                 <a:latin typeface="Calibri"/>
               </a:rPr>
@@ -10303,7 +10303,7 @@
             <a:avLst/>
           </a:prstGeom>
           <a:solidFill>
-            <a:srgbClr val="2E8B57"/>
+            <a:srgbClr val="2A7F50"/>
           </a:solidFill>
           <a:ln>
             <a:noFill/>
@@ -10347,7 +10347,7 @@
             <a:avLst/>
           </a:prstGeom>
           <a:solidFill>
-            <a:srgbClr val="2E8B57"/>
+            <a:srgbClr val="2A7F50"/>
           </a:solidFill>
           <a:ln>
             <a:noFill/>
@@ -10761,7 +10761,7 @@
             <a:avLst/>
           </a:prstGeom>
           <a:solidFill>
-            <a:srgbClr val="2E8B57"/>
+            <a:srgbClr val="2A7F50"/>
           </a:solidFill>
           <a:ln>
             <a:noFill/>
@@ -10805,7 +10805,7 @@
             <a:avLst/>
           </a:prstGeom>
           <a:solidFill>
-            <a:srgbClr val="2E8B57"/>
+            <a:srgbClr val="2A7F50"/>
           </a:solidFill>
           <a:ln>
             <a:noFill/>
@@ -11162,7 +11162,7 @@
             <a:avLst/>
           </a:prstGeom>
           <a:solidFill>
-            <a:srgbClr val="B7791F"/>
+            <a:srgbClr val="99651A"/>
           </a:solidFill>
           <a:ln>
             <a:noFill/>
@@ -11224,7 +11224,7 @@
             <a:r>
               <a:rPr sz="1200" b="1" i="0">
                 <a:solidFill>
-                  <a:srgbClr val="B7791F"/>
+                  <a:srgbClr val="99651A"/>
                 </a:solidFill>
                 <a:latin typeface="Calibri"/>
               </a:rPr>
@@ -11467,7 +11467,7 @@
             <a:r>
               <a:rPr sz="750" b="0" i="0">
                 <a:solidFill>
-                  <a:srgbClr val="6B7280"/>
+                  <a:srgbClr val="686F7D"/>
                 </a:solidFill>
                 <a:latin typeface="Calibri"/>
               </a:rPr>
@@ -11958,7 +11958,7 @@
             <a:avLst/>
           </a:prstGeom>
           <a:solidFill>
-            <a:srgbClr val="2E8B57"/>
+            <a:srgbClr val="2A7F50"/>
           </a:solidFill>
           <a:ln>
             <a:noFill/>
@@ -12421,7 +12421,7 @@
             <a:avLst/>
           </a:prstGeom>
           <a:solidFill>
-            <a:srgbClr val="B7791F"/>
+            <a:srgbClr val="99651A"/>
           </a:solidFill>
           <a:ln>
             <a:noFill/>
@@ -12483,7 +12483,7 @@
             <a:r>
               <a:rPr sz="1200" b="1" i="0">
                 <a:solidFill>
-                  <a:srgbClr val="B7791F"/>
+                  <a:srgbClr val="99651A"/>
                 </a:solidFill>
                 <a:latin typeface="Calibri"/>
               </a:rPr>
@@ -12726,7 +12726,7 @@
             <a:r>
               <a:rPr sz="750" b="0" i="0">
                 <a:solidFill>
-                  <a:srgbClr val="6B7280"/>
+                  <a:srgbClr val="686F7D"/>
                 </a:solidFill>
                 <a:latin typeface="Calibri"/>
               </a:rPr>
@@ -12896,7 +12896,7 @@
             <a:r>
               <a:rPr sz="1150" b="1" i="0">
                 <a:solidFill>
-                  <a:srgbClr val="6B7280"/>
+                  <a:srgbClr val="686F7D"/>
                 </a:solidFill>
                 <a:latin typeface="Calibri"/>
               </a:rPr>
@@ -13832,7 +13832,7 @@
             <a:avLst/>
           </a:prstGeom>
           <a:solidFill>
-            <a:srgbClr val="B7791F"/>
+            <a:srgbClr val="99651A"/>
           </a:solidFill>
           <a:ln>
             <a:noFill/>
@@ -13876,7 +13876,7 @@
             <a:avLst/>
           </a:prstGeom>
           <a:solidFill>
-            <a:srgbClr val="B7791F"/>
+            <a:srgbClr val="99651A"/>
           </a:solidFill>
           <a:ln>
             <a:noFill/>
@@ -14120,7 +14120,7 @@
             <a:avLst/>
           </a:prstGeom>
           <a:solidFill>
-            <a:srgbClr val="2E8B57"/>
+            <a:srgbClr val="2A7F50"/>
           </a:solidFill>
           <a:ln>
             <a:noFill/>
@@ -14164,7 +14164,7 @@
             <a:avLst/>
           </a:prstGeom>
           <a:solidFill>
-            <a:srgbClr val="2E8B57"/>
+            <a:srgbClr val="2A7F50"/>
           </a:solidFill>
           <a:ln>
             <a:noFill/>
@@ -14408,7 +14408,7 @@
             <a:avLst/>
           </a:prstGeom>
           <a:solidFill>
-            <a:srgbClr val="2E8B57"/>
+            <a:srgbClr val="2A7F50"/>
           </a:solidFill>
           <a:ln>
             <a:noFill/>
@@ -14452,7 +14452,7 @@
             <a:avLst/>
           </a:prstGeom>
           <a:solidFill>
-            <a:srgbClr val="2E8B57"/>
+            <a:srgbClr val="2A7F50"/>
           </a:solidFill>
           <a:ln>
             <a:noFill/>
@@ -14622,7 +14622,7 @@
             <a:r>
               <a:rPr sz="1150" b="1" i="0">
                 <a:solidFill>
-                  <a:srgbClr val="6B7280"/>
+                  <a:srgbClr val="686F7D"/>
                 </a:solidFill>
                 <a:latin typeface="Calibri"/>
               </a:rPr>
@@ -16839,7 +16839,7 @@
             <a:r>
               <a:rPr sz="750" b="0" i="0">
                 <a:solidFill>
-                  <a:srgbClr val="6B7280"/>
+                  <a:srgbClr val="686F7D"/>
                 </a:solidFill>
                 <a:latin typeface="Calibri"/>
               </a:rPr>
@@ -18761,7 +18761,7 @@
             <a:r>
               <a:rPr sz="980" b="1" i="0">
                 <a:solidFill>
-                  <a:srgbClr val="B7791F"/>
+                  <a:srgbClr val="99651A"/>
                 </a:solidFill>
                 <a:latin typeface="Calibri"/>
               </a:rPr>
@@ -19535,7 +19535,7 @@
             <a:avLst/>
           </a:prstGeom>
           <a:solidFill>
-            <a:srgbClr val="2E8B57"/>
+            <a:srgbClr val="2A7F50"/>
           </a:solidFill>
           <a:ln>
             <a:noFill/>
@@ -19597,7 +19597,7 @@
             <a:r>
               <a:rPr sz="1200" b="1" i="0">
                 <a:solidFill>
-                  <a:srgbClr val="2E8B57"/>
+                  <a:srgbClr val="2A7F50"/>
                 </a:solidFill>
                 <a:latin typeface="Calibri"/>
               </a:rPr>
@@ -19840,7 +19840,7 @@
             <a:r>
               <a:rPr sz="750" b="0" i="0">
                 <a:solidFill>
-                  <a:srgbClr val="6B7280"/>
+                  <a:srgbClr val="686F7D"/>
                 </a:solidFill>
                 <a:latin typeface="Calibri"/>
               </a:rPr>
@@ -20481,7 +20481,7 @@
             <a:r>
               <a:rPr sz="1080" b="1" i="0">
                 <a:solidFill>
-                  <a:srgbClr val="2E8B57"/>
+                  <a:srgbClr val="2A7F50"/>
                 </a:solidFill>
                 <a:latin typeface="Calibri"/>
               </a:rPr>
@@ -20745,7 +20745,7 @@
             <a:r>
               <a:rPr sz="1080" b="1" i="0">
                 <a:solidFill>
-                  <a:srgbClr val="2E8B57"/>
+                  <a:srgbClr val="2A7F50"/>
                 </a:solidFill>
                 <a:latin typeface="Calibri"/>
               </a:rPr>
@@ -21009,7 +21009,7 @@
             <a:r>
               <a:rPr sz="1080" b="1" i="0">
                 <a:solidFill>
-                  <a:srgbClr val="2E8B57"/>
+                  <a:srgbClr val="2A7F50"/>
                 </a:solidFill>
                 <a:latin typeface="Calibri"/>
               </a:rPr>
@@ -21273,7 +21273,7 @@
             <a:r>
               <a:rPr sz="1080" b="1" i="0">
                 <a:solidFill>
-                  <a:srgbClr val="2E8B57"/>
+                  <a:srgbClr val="2A7F50"/>
                 </a:solidFill>
                 <a:latin typeface="Calibri"/>
               </a:rPr>
@@ -21449,7 +21449,7 @@
             <a:r>
               <a:rPr sz="1080" b="0" i="0">
                 <a:solidFill>
-                  <a:srgbClr val="B7791F"/>
+                  <a:srgbClr val="99651A"/>
                 </a:solidFill>
                 <a:latin typeface="Calibri"/>
               </a:rPr>
@@ -21537,7 +21537,7 @@
             <a:r>
               <a:rPr sz="1080" b="1" i="0">
                 <a:solidFill>
-                  <a:srgbClr val="2E8B57"/>
+                  <a:srgbClr val="2A7F50"/>
                 </a:solidFill>
                 <a:latin typeface="Calibri"/>
               </a:rPr>
@@ -21801,7 +21801,7 @@
             <a:r>
               <a:rPr sz="1080" b="1" i="0">
                 <a:solidFill>
-                  <a:srgbClr val="2E8B57"/>
+                  <a:srgbClr val="2A7F50"/>
                 </a:solidFill>
                 <a:latin typeface="Calibri"/>
               </a:rPr>
@@ -22065,7 +22065,7 @@
             <a:r>
               <a:rPr sz="1080" b="1" i="0">
                 <a:solidFill>
-                  <a:srgbClr val="2E8B57"/>
+                  <a:srgbClr val="2A7F50"/>
                 </a:solidFill>
                 <a:latin typeface="Calibri"/>
               </a:rPr>
@@ -22135,7 +22135,7 @@
             <a:avLst/>
           </a:prstGeom>
           <a:solidFill>
-            <a:srgbClr val="B7791F"/>
+            <a:srgbClr val="99651A"/>
           </a:solidFill>
           <a:ln>
             <a:noFill/>
@@ -22197,7 +22197,7 @@
             <a:r>
               <a:rPr sz="1200" b="1" i="0">
                 <a:solidFill>
-                  <a:srgbClr val="B7791F"/>
+                  <a:srgbClr val="99651A"/>
                 </a:solidFill>
                 <a:latin typeface="Calibri"/>
               </a:rPr>
@@ -22281,7 +22281,7 @@
             <a:r>
               <a:rPr sz="800" b="0" i="0">
                 <a:solidFill>
-                  <a:srgbClr val="6B7280"/>
+                  <a:srgbClr val="686F7D"/>
                 </a:solidFill>
                 <a:latin typeface="Calibri"/>
               </a:rPr>
@@ -22482,7 +22482,7 @@
             <a:r>
               <a:rPr sz="750" b="0" i="0">
                 <a:solidFill>
-                  <a:srgbClr val="6B7280"/>
+                  <a:srgbClr val="686F7D"/>
                 </a:solidFill>
                 <a:latin typeface="Calibri"/>
               </a:rPr>
@@ -23369,7 +23369,7 @@
             <a:avLst/>
           </a:prstGeom>
           <a:solidFill>
-            <a:srgbClr val="B7791F"/>
+            <a:srgbClr val="99651A"/>
           </a:solidFill>
           <a:ln>
             <a:noFill/>
@@ -23413,7 +23413,7 @@
             <a:avLst/>
           </a:prstGeom>
           <a:solidFill>
-            <a:srgbClr val="B7791F"/>
+            <a:srgbClr val="99651A"/>
           </a:solidFill>
           <a:ln>
             <a:noFill/>
@@ -23827,7 +23827,7 @@
             <a:avLst/>
           </a:prstGeom>
           <a:solidFill>
-            <a:srgbClr val="2E8B57"/>
+            <a:srgbClr val="2A7F50"/>
           </a:solidFill>
           <a:ln>
             <a:noFill/>
@@ -23871,7 +23871,7 @@
             <a:avLst/>
           </a:prstGeom>
           <a:solidFill>
-            <a:srgbClr val="2E8B57"/>
+            <a:srgbClr val="2A7F50"/>
           </a:solidFill>
           <a:ln>
             <a:noFill/>
@@ -24228,7 +24228,7 @@
             <a:avLst/>
           </a:prstGeom>
           <a:solidFill>
-            <a:srgbClr val="2E8B57"/>
+            <a:srgbClr val="2A7F50"/>
           </a:solidFill>
           <a:ln>
             <a:noFill/>
@@ -24290,7 +24290,7 @@
             <a:r>
               <a:rPr sz="1200" b="1" i="0">
                 <a:solidFill>
-                  <a:srgbClr val="2E8B57"/>
+                  <a:srgbClr val="2A7F50"/>
                 </a:solidFill>
                 <a:latin typeface="Calibri"/>
               </a:rPr>
@@ -24533,7 +24533,7 @@
             <a:r>
               <a:rPr sz="750" b="0" i="0">
                 <a:solidFill>
-                  <a:srgbClr val="6B7280"/>
+                  <a:srgbClr val="686F7D"/>
                 </a:solidFill>
                 <a:latin typeface="Calibri"/>
               </a:rPr>
@@ -25350,7 +25350,7 @@
             <a:r>
               <a:rPr sz="1040" b="1" i="0">
                 <a:solidFill>
-                  <a:srgbClr val="2E8B57"/>
+                  <a:srgbClr val="2A7F50"/>
                 </a:solidFill>
                 <a:latin typeface="Calibri"/>
               </a:rPr>
@@ -25438,7 +25438,7 @@
             <a:r>
               <a:rPr sz="1040" b="0" i="0">
                 <a:solidFill>
-                  <a:srgbClr val="B7791F"/>
+                  <a:srgbClr val="99651A"/>
                 </a:solidFill>
                 <a:latin typeface="Calibri"/>
               </a:rPr>
@@ -25614,7 +25614,7 @@
             <a:r>
               <a:rPr sz="1040" b="1" i="0">
                 <a:solidFill>
-                  <a:srgbClr val="2E8B57"/>
+                  <a:srgbClr val="2A7F50"/>
                 </a:solidFill>
                 <a:latin typeface="Calibri"/>
               </a:rPr>
@@ -25702,7 +25702,7 @@
             <a:r>
               <a:rPr sz="1040" b="0" i="0">
                 <a:solidFill>
-                  <a:srgbClr val="B7791F"/>
+                  <a:srgbClr val="99651A"/>
                 </a:solidFill>
                 <a:latin typeface="Calibri"/>
               </a:rPr>
@@ -25878,7 +25878,7 @@
             <a:r>
               <a:rPr sz="1040" b="0" i="0">
                 <a:solidFill>
-                  <a:srgbClr val="B7791F"/>
+                  <a:srgbClr val="99651A"/>
                 </a:solidFill>
                 <a:latin typeface="Calibri"/>
               </a:rPr>
@@ -25966,7 +25966,7 @@
             <a:r>
               <a:rPr sz="1040" b="0" i="0">
                 <a:solidFill>
-                  <a:srgbClr val="B7791F"/>
+                  <a:srgbClr val="99651A"/>
                 </a:solidFill>
                 <a:latin typeface="Calibri"/>
               </a:rPr>
@@ -26142,7 +26142,7 @@
             <a:r>
               <a:rPr sz="1040" b="0" i="0">
                 <a:solidFill>
-                  <a:srgbClr val="B7791F"/>
+                  <a:srgbClr val="99651A"/>
                 </a:solidFill>
                 <a:latin typeface="Calibri"/>
               </a:rPr>
@@ -26406,7 +26406,7 @@
             <a:r>
               <a:rPr sz="1040" b="1" i="0">
                 <a:solidFill>
-                  <a:srgbClr val="2E8B57"/>
+                  <a:srgbClr val="2A7F50"/>
                 </a:solidFill>
                 <a:latin typeface="Calibri"/>
               </a:rPr>
@@ -26494,7 +26494,7 @@
             <a:r>
               <a:rPr sz="1040" b="0" i="0">
                 <a:solidFill>
-                  <a:srgbClr val="B7791F"/>
+                  <a:srgbClr val="99651A"/>
                 </a:solidFill>
                 <a:latin typeface="Calibri"/>
               </a:rPr>
@@ -26670,7 +26670,7 @@
             <a:r>
               <a:rPr sz="1040" b="1" i="0">
                 <a:solidFill>
-                  <a:srgbClr val="2E8B57"/>
+                  <a:srgbClr val="2A7F50"/>
                 </a:solidFill>
                 <a:latin typeface="Calibri"/>
               </a:rPr>
@@ -26758,7 +26758,7 @@
             <a:r>
               <a:rPr sz="1040" b="1" i="0">
                 <a:solidFill>
-                  <a:srgbClr val="2E8B57"/>
+                  <a:srgbClr val="2A7F50"/>
                 </a:solidFill>
                 <a:latin typeface="Calibri"/>
               </a:rPr>
@@ -26934,7 +26934,7 @@
             <a:r>
               <a:rPr sz="1040" b="0" i="0">
                 <a:solidFill>
-                  <a:srgbClr val="B7791F"/>
+                  <a:srgbClr val="99651A"/>
                 </a:solidFill>
                 <a:latin typeface="Calibri"/>
               </a:rPr>
@@ -27022,7 +27022,7 @@
             <a:r>
               <a:rPr sz="1040" b="0" i="0">
                 <a:solidFill>
-                  <a:srgbClr val="B7791F"/>
+                  <a:srgbClr val="99651A"/>
                 </a:solidFill>
                 <a:latin typeface="Calibri"/>
               </a:rPr>
@@ -27198,7 +27198,7 @@
             <a:r>
               <a:rPr sz="1040" b="1" i="0">
                 <a:solidFill>
-                  <a:srgbClr val="2E8B57"/>
+                  <a:srgbClr val="2A7F50"/>
                 </a:solidFill>
                 <a:latin typeface="Calibri"/>
               </a:rPr>
@@ -27502,7 +27502,7 @@
             <a:r>
               <a:rPr sz="800" b="0" i="0">
                 <a:solidFill>
-                  <a:srgbClr val="6B7280"/>
+                  <a:srgbClr val="686F7D"/>
                 </a:solidFill>
                 <a:latin typeface="Calibri"/>
               </a:rPr>
@@ -27703,7 +27703,7 @@
             <a:r>
               <a:rPr sz="750" b="0" i="0">
                 <a:solidFill>
-                  <a:srgbClr val="6B7280"/>
+                  <a:srgbClr val="686F7D"/>
                 </a:solidFill>
                 <a:latin typeface="Calibri"/>
               </a:rPr>
@@ -29231,7 +29231,7 @@
             <a:r>
               <a:rPr sz="960" b="1" i="0">
                 <a:solidFill>
-                  <a:srgbClr val="B7791F"/>
+                  <a:srgbClr val="99651A"/>
                 </a:solidFill>
                 <a:latin typeface="Calibri"/>
               </a:rPr>
@@ -29583,7 +29583,7 @@
             <a:r>
               <a:rPr sz="960" b="1" i="0">
                 <a:solidFill>
-                  <a:srgbClr val="B7791F"/>
+                  <a:srgbClr val="99651A"/>
                 </a:solidFill>
                 <a:latin typeface="Calibri"/>
               </a:rPr>
@@ -29935,7 +29935,7 @@
             <a:r>
               <a:rPr sz="960" b="1" i="0">
                 <a:solidFill>
-                  <a:srgbClr val="B7791F"/>
+                  <a:srgbClr val="99651A"/>
                 </a:solidFill>
                 <a:latin typeface="Calibri"/>
               </a:rPr>
@@ -30287,7 +30287,7 @@
             <a:r>
               <a:rPr sz="960" b="1" i="0">
                 <a:solidFill>
-                  <a:srgbClr val="B7791F"/>
+                  <a:srgbClr val="99651A"/>
                 </a:solidFill>
                 <a:latin typeface="Calibri"/>
               </a:rPr>
@@ -30639,7 +30639,7 @@
             <a:r>
               <a:rPr sz="960" b="1" i="0">
                 <a:solidFill>
-                  <a:srgbClr val="B7791F"/>
+                  <a:srgbClr val="99651A"/>
                 </a:solidFill>
                 <a:latin typeface="Calibri"/>
               </a:rPr>
@@ -30991,7 +30991,7 @@
             <a:r>
               <a:rPr sz="960" b="1" i="0">
                 <a:solidFill>
-                  <a:srgbClr val="B7791F"/>
+                  <a:srgbClr val="99651A"/>
                 </a:solidFill>
                 <a:latin typeface="Calibri"/>
               </a:rPr>
@@ -31366,7 +31366,7 @@
             <a:r>
               <a:rPr sz="750" b="0" i="0">
                 <a:solidFill>
-                  <a:srgbClr val="6B7280"/>
+                  <a:srgbClr val="686F7D"/>
                 </a:solidFill>
                 <a:latin typeface="Calibri"/>
               </a:rPr>
@@ -31564,7 +31564,7 @@
             <a:avLst/>
           </a:prstGeom>
           <a:solidFill>
-            <a:srgbClr val="2E8B57"/>
+            <a:srgbClr val="2A7F50"/>
           </a:solidFill>
           <a:ln>
             <a:noFill/>
@@ -31626,7 +31626,7 @@
             <a:r>
               <a:rPr sz="1200" b="1" i="0">
                 <a:solidFill>
-                  <a:srgbClr val="2E8B57"/>
+                  <a:srgbClr val="2A7F50"/>
                 </a:solidFill>
                 <a:latin typeface="Calibri"/>
               </a:rPr>
@@ -32781,7 +32781,7 @@
             <a:avLst/>
           </a:prstGeom>
           <a:solidFill>
-            <a:srgbClr val="B7791F"/>
+            <a:srgbClr val="99651A"/>
           </a:solidFill>
           <a:ln>
             <a:noFill/>
@@ -32843,7 +32843,7 @@
             <a:r>
               <a:rPr sz="1200" b="1" i="0">
                 <a:solidFill>
-                  <a:srgbClr val="B7791F"/>
+                  <a:srgbClr val="99651A"/>
                 </a:solidFill>
                 <a:latin typeface="Calibri"/>
               </a:rPr>
@@ -33086,7 +33086,7 @@
             <a:r>
               <a:rPr sz="750" b="0" i="0">
                 <a:solidFill>
-                  <a:srgbClr val="6B7280"/>
+                  <a:srgbClr val="686F7D"/>
                 </a:solidFill>
                 <a:latin typeface="Calibri"/>
               </a:rPr>
@@ -34177,7 +34177,7 @@
             <a:avLst/>
           </a:prstGeom>
           <a:solidFill>
-            <a:srgbClr val="2E8B57"/>
+            <a:srgbClr val="2A7F50"/>
           </a:solidFill>
           <a:ln>
             <a:noFill/>
@@ -34221,7 +34221,7 @@
             <a:avLst/>
           </a:prstGeom>
           <a:solidFill>
-            <a:srgbClr val="2E8B57"/>
+            <a:srgbClr val="2A7F50"/>
           </a:solidFill>
           <a:ln>
             <a:noFill/>
@@ -34274,7 +34274,7 @@
             <a:avLst/>
           </a:prstGeom>
           <a:solidFill>
-            <a:srgbClr val="2E8B57"/>
+            <a:srgbClr val="2A7F50"/>
           </a:solidFill>
           <a:ln>
             <a:noFill/>
@@ -34474,7 +34474,7 @@
             <a:avLst/>
           </a:prstGeom>
           <a:solidFill>
-            <a:srgbClr val="B7791F"/>
+            <a:srgbClr val="99651A"/>
           </a:solidFill>
           <a:ln>
             <a:noFill/>
@@ -34518,7 +34518,7 @@
             <a:avLst/>
           </a:prstGeom>
           <a:solidFill>
-            <a:srgbClr val="B7791F"/>
+            <a:srgbClr val="99651A"/>
           </a:solidFill>
           <a:ln>
             <a:noFill/>
@@ -34571,7 +34571,7 @@
             <a:avLst/>
           </a:prstGeom>
           <a:solidFill>
-            <a:srgbClr val="B7791F"/>
+            <a:srgbClr val="99651A"/>
           </a:solidFill>
           <a:ln>
             <a:noFill/>
@@ -34769,7 +34769,7 @@
             <a:avLst/>
           </a:prstGeom>
           <a:solidFill>
-            <a:srgbClr val="2E8B57"/>
+            <a:srgbClr val="2A7F50"/>
           </a:solidFill>
           <a:ln>
             <a:noFill/>
@@ -34831,7 +34831,7 @@
             <a:r>
               <a:rPr sz="1200" b="1" i="0">
                 <a:solidFill>
-                  <a:srgbClr val="2E8B57"/>
+                  <a:srgbClr val="2A7F50"/>
                 </a:solidFill>
                 <a:latin typeface="Calibri"/>
               </a:rPr>
@@ -35074,7 +35074,7 @@
             <a:r>
               <a:rPr sz="750" b="0" i="0">
                 <a:solidFill>
-                  <a:srgbClr val="6B7280"/>
+                  <a:srgbClr val="686F7D"/>
                 </a:solidFill>
                 <a:latin typeface="Calibri"/>
               </a:rPr>
@@ -37950,7 +37950,7 @@
             <a:avLst/>
           </a:prstGeom>
           <a:solidFill>
-            <a:srgbClr val="B7791F"/>
+            <a:srgbClr val="99651A"/>
           </a:solidFill>
           <a:ln>
             <a:noFill/>
@@ -38012,7 +38012,7 @@
             <a:r>
               <a:rPr sz="1200" b="1" i="0">
                 <a:solidFill>
-                  <a:srgbClr val="B7791F"/>
+                  <a:srgbClr val="99651A"/>
                 </a:solidFill>
                 <a:latin typeface="Calibri"/>
               </a:rPr>
@@ -38255,7 +38255,7 @@
             <a:r>
               <a:rPr sz="750" b="0" i="0">
                 <a:solidFill>
-                  <a:srgbClr val="6B7280"/>
+                  <a:srgbClr val="686F7D"/>
                 </a:solidFill>
                 <a:latin typeface="Calibri"/>
               </a:rPr>
@@ -38803,7 +38803,7 @@
             <a:avLst/>
           </a:prstGeom>
           <a:solidFill>
-            <a:srgbClr val="2E8B57"/>
+            <a:srgbClr val="2A7F50"/>
           </a:solidFill>
           <a:ln>
             <a:noFill/>
@@ -39079,7 +39079,7 @@
             <a:r>
               <a:rPr sz="1050" b="1" i="0">
                 <a:solidFill>
-                  <a:srgbClr val="2E8B57"/>
+                  <a:srgbClr val="2A7F50"/>
                 </a:solidFill>
                 <a:latin typeface="Calibri"/>
               </a:rPr>
@@ -39454,7 +39454,7 @@
             <a:r>
               <a:rPr sz="750" b="0" i="0">
                 <a:solidFill>
-                  <a:srgbClr val="6B7280"/>
+                  <a:srgbClr val="686F7D"/>
                 </a:solidFill>
                 <a:latin typeface="Calibri"/>
               </a:rPr>
@@ -39696,7 +39696,7 @@
             <a:avLst/>
           </a:prstGeom>
           <a:solidFill>
-            <a:srgbClr val="2E8B57"/>
+            <a:srgbClr val="2A7F50"/>
           </a:solidFill>
           <a:ln>
             <a:noFill/>
@@ -40100,7 +40100,7 @@
             <a:avLst/>
           </a:prstGeom>
           <a:solidFill>
-            <a:srgbClr val="B7791F"/>
+            <a:srgbClr val="99651A"/>
           </a:solidFill>
           <a:ln>
             <a:noFill/>
@@ -40788,7 +40788,7 @@
             <a:r>
               <a:rPr sz="750" b="0" i="0">
                 <a:solidFill>
-                  <a:srgbClr val="6B7280"/>
+                  <a:srgbClr val="686F7D"/>
                 </a:solidFill>
                 <a:latin typeface="Calibri"/>
               </a:rPr>
@@ -41276,7 +41276,7 @@
             <a:avLst/>
           </a:prstGeom>
           <a:solidFill>
-            <a:srgbClr val="2E8B57"/>
+            <a:srgbClr val="2A7F50"/>
           </a:solidFill>
           <a:ln>
             <a:noFill/>
@@ -41520,7 +41520,7 @@
             <a:avLst/>
           </a:prstGeom>
           <a:solidFill>
-            <a:srgbClr val="B7791F"/>
+            <a:srgbClr val="99651A"/>
           </a:solidFill>
           <a:ln>
             <a:noFill/>
@@ -41564,7 +41564,7 @@
             <a:avLst/>
           </a:prstGeom>
           <a:solidFill>
-            <a:srgbClr val="B7791F"/>
+            <a:srgbClr val="99651A"/>
           </a:solidFill>
           <a:ln>
             <a:noFill/>
@@ -42612,7 +42612,7 @@
             <a:avLst/>
           </a:prstGeom>
           <a:solidFill>
-            <a:srgbClr val="2E8B57"/>
+            <a:srgbClr val="2A7F50"/>
           </a:solidFill>
           <a:ln>
             <a:noFill/>
@@ -42674,7 +42674,7 @@
             <a:r>
               <a:rPr sz="1200" b="1" i="0">
                 <a:solidFill>
-                  <a:srgbClr val="2E8B57"/>
+                  <a:srgbClr val="2A7F50"/>
                 </a:solidFill>
                 <a:latin typeface="Calibri"/>
               </a:rPr>
@@ -42917,7 +42917,7 @@
             <a:r>
               <a:rPr sz="750" b="0" i="0">
                 <a:solidFill>
-                  <a:srgbClr val="6B7280"/>
+                  <a:srgbClr val="686F7D"/>
                 </a:solidFill>
                 <a:latin typeface="Calibri"/>
               </a:rPr>
@@ -43087,7 +43087,7 @@
             <a:r>
               <a:rPr sz="1150" b="1" i="0">
                 <a:solidFill>
-                  <a:srgbClr val="6B7280"/>
+                  <a:srgbClr val="686F7D"/>
                 </a:solidFill>
                 <a:latin typeface="Calibri"/>
               </a:rPr>
@@ -44023,7 +44023,7 @@
             <a:avLst/>
           </a:prstGeom>
           <a:solidFill>
-            <a:srgbClr val="2E8B57"/>
+            <a:srgbClr val="2A7F50"/>
           </a:solidFill>
           <a:ln>
             <a:noFill/>
@@ -44067,7 +44067,7 @@
             <a:avLst/>
           </a:prstGeom>
           <a:solidFill>
-            <a:srgbClr val="2E8B57"/>
+            <a:srgbClr val="2A7F50"/>
           </a:solidFill>
           <a:ln>
             <a:noFill/>
@@ -44311,7 +44311,7 @@
             <a:avLst/>
           </a:prstGeom>
           <a:solidFill>
-            <a:srgbClr val="B7791F"/>
+            <a:srgbClr val="99651A"/>
           </a:solidFill>
           <a:ln>
             <a:noFill/>
@@ -44355,7 +44355,7 @@
             <a:avLst/>
           </a:prstGeom>
           <a:solidFill>
-            <a:srgbClr val="B7791F"/>
+            <a:srgbClr val="99651A"/>
           </a:solidFill>
           <a:ln>
             <a:noFill/>
@@ -44599,7 +44599,7 @@
             <a:avLst/>
           </a:prstGeom>
           <a:solidFill>
-            <a:srgbClr val="2E8B57"/>
+            <a:srgbClr val="2A7F50"/>
           </a:solidFill>
           <a:ln>
             <a:noFill/>
@@ -44643,7 +44643,7 @@
             <a:avLst/>
           </a:prstGeom>
           <a:solidFill>
-            <a:srgbClr val="2E8B57"/>
+            <a:srgbClr val="2A7F50"/>
           </a:solidFill>
           <a:ln>
             <a:noFill/>
@@ -44813,7 +44813,7 @@
             <a:r>
               <a:rPr sz="1150" b="1" i="0">
                 <a:solidFill>
-                  <a:srgbClr val="6B7280"/>
+                  <a:srgbClr val="686F7D"/>
                 </a:solidFill>
                 <a:latin typeface="Calibri"/>
               </a:rPr>
@@ -45102,7 +45102,7 @@
             <a:avLst/>
           </a:prstGeom>
           <a:solidFill>
-            <a:srgbClr val="2E8B57"/>
+            <a:srgbClr val="2A7F50"/>
           </a:solidFill>
           <a:ln>
             <a:noFill/>
@@ -46083,7 +46083,7 @@
             <a:avLst/>
           </a:prstGeom>
           <a:solidFill>
-            <a:srgbClr val="B7791F"/>
+            <a:srgbClr val="99651A"/>
           </a:solidFill>
           <a:ln>
             <a:noFill/>
@@ -46145,7 +46145,7 @@
             <a:r>
               <a:rPr sz="1200" b="1" i="0">
                 <a:solidFill>
-                  <a:srgbClr val="B7791F"/>
+                  <a:srgbClr val="99651A"/>
                 </a:solidFill>
                 <a:latin typeface="Calibri"/>
               </a:rPr>
@@ -46388,7 +46388,7 @@
             <a:r>
               <a:rPr sz="750" b="0" i="0">
                 <a:solidFill>
-                  <a:srgbClr val="6B7280"/>
+                  <a:srgbClr val="686F7D"/>
                 </a:solidFill>
                 <a:latin typeface="Calibri"/>
               </a:rPr>
@@ -49258,7 +49258,7 @@
             <a:avLst/>
           </a:prstGeom>
           <a:solidFill>
-            <a:srgbClr val="B7791F"/>
+            <a:srgbClr val="99651A"/>
           </a:solidFill>
           <a:ln>
             <a:noFill/>
@@ -49320,7 +49320,7 @@
             <a:r>
               <a:rPr sz="1200" b="1" i="0">
                 <a:solidFill>
-                  <a:srgbClr val="B7791F"/>
+                  <a:srgbClr val="99651A"/>
                 </a:solidFill>
                 <a:latin typeface="Calibri"/>
               </a:rPr>
@@ -49563,7 +49563,7 @@
             <a:r>
               <a:rPr sz="750" b="0" i="0">
                 <a:solidFill>
-                  <a:srgbClr val="6B7280"/>
+                  <a:srgbClr val="686F7D"/>
                 </a:solidFill>
                 <a:latin typeface="Calibri"/>
               </a:rPr>
@@ -51084,7 +51084,7 @@
             <a:r>
               <a:rPr sz="750" b="0" i="0">
                 <a:solidFill>
-                  <a:srgbClr val="6B7280"/>
+                  <a:srgbClr val="686F7D"/>
                 </a:solidFill>
                 <a:latin typeface="Calibri"/>
               </a:rPr>
@@ -53340,7 +53340,7 @@
             <a:avLst/>
           </a:prstGeom>
           <a:solidFill>
-            <a:srgbClr val="B7791F"/>
+            <a:srgbClr val="99651A"/>
           </a:solidFill>
           <a:ln>
             <a:noFill/>
@@ -53402,7 +53402,7 @@
             <a:r>
               <a:rPr sz="1200" b="1" i="0">
                 <a:solidFill>
-                  <a:srgbClr val="B7791F"/>
+                  <a:srgbClr val="99651A"/>
                 </a:solidFill>
                 <a:latin typeface="Calibri"/>
               </a:rPr>

--- a/CostVision-CAPEE-Implementation-Options.pptx
+++ b/CostVision-CAPEE-Implementation-Options.pptx
@@ -525,7 +525,7 @@
           <a:lstStyle/>
           <a:p>
             <a:r>
-              <a:t>Thank you for the time. I want to take you through two things we could do with a tool we have built called CostVision, and ask for a decision on the first one. The first is to let it fill in the numbers CAPEE needs, automatically, off the 3D model and the drawing, and prove that works on our own parts. The second, once that is proven, is to cost a whole basket of parts in one unattended run. I will be straight about what the tool does today and what it does not. There are no dates in this pack. Nobody in IT or the business has sized any of this yet, so any timeline I put up would be made up. What I can show you is the order the work has to happen in.</a:t>
+              <a:t>Thank you for the time. I want to walk you through two ways a tool we have built, CostVision, could work with CAPEE, and ask for a decision on the first one. The first option is simple. CAPEE keeps doing the costing. CostVision measures the 3D model and fills in the numbers CAPEE needs, and we prove that on our own parts. The second option comes later. It is costing a whole basket of parts in one run, unattended. Neither option needs AI. In the build we have given JLR, AI is switched off. I will be straight about what the tool does today and what it does not. The biggest gap is that it has never been checked against a price JLR actually paid. There are also no dates in this pack. Nobody has sized this work yet, so any timeline I showed you would be made up. What I can show is the order the work has to happen in.</a:t>
             </a:r>
           </a:p>
         </p:txBody>
@@ -595,7 +595,7 @@
           <a:lstStyle/>
           <a:p>
             <a:r>
-              <a:t>I cannot give you one answer because nobody has told us how CAPEE is built. Rather than hold everything up, here are all three routes. All of them work. What changes is how much effort each takes, and I have shown that against each other rather than in weeks, because none of this has been sized. If you made me pick blind I would take route B, running it alongside, because it works whatever CAPEE is and we can improve our side without disturbing it. The three questions in amber are what I need from IT.</a:t>
+              <a:t>I cannot give you one answer here, because nobody has told us how CAPEE is built. Rather than hold everything up, here are all three routes. Any of them could work. What changes is the effort, and I have shown that against each other rather than in weeks, because none of it has been sized. Route A puts our code inside CAPEE, which is easiest if CAPEE is built in JavaScript. Route B runs CostVision alongside as its own service, and CAPEE asks it for numbers. Route C just passes a file across, which is simple but needs someone to move the file. If you made me pick blind, I would take route B. It works whatever CAPEE is, and we can improve our side without touching CAPEE. The three questions in the amber box are what I need from IT to choose properly.</a:t>
             </a:r>
           </a:p>
         </p:txBody>
@@ -665,7 +665,7 @@
           <a:lstStyle/>
           <a:p>
             <a:r>
-              <a:t>This is what we would actually get out of the trial, and I want to be concrete because these four numbers do not exist today. First, how close is it. We cost the parts, compare against what we paid, and report the error. The test I would use is whether the real error lands inside the range the tool predicted for itself. A tool that is wrong and says so is usable. One that is wrong and confident is not. Second, how often the engineer has to step in. On our own eight test parts, once the material family was given, six went straight through and two stopped and asked. Given nothing at all, all eight stop and ask, because a solid model cannot tell steel from aluminium. In a bulk run that answer would come off the part master rather than from a person. I need that figure on JLR parts. Third, the time saving, measured by doing the same parts both ways. Fourth, what it refused and whether it was right to. And the green strip is the reason to do it even if the answer disappoints us. Right now nobody can state an accuracy figure at all, and every conversation about this tool stops there.</a:t>
+              <a:t>This is what we would get out of the trial. I want to be concrete, because none of these four numbers exists today. First, how close is it. We cost the parts, compare with what we paid, and report the error. Every result in the tool comes with a range, a low and a high. The test I would use is whether the real price falls inside that range. A tool that is wrong and says so is usable. One that is wrong and confident is not. Second, how often the engineer steps in. Every part will ask for the material, because a solid model cannot tell steel from aluminium. In a bulk run that answer can come from the part list. The rest we need to count on JLR parts. Third, the time saving, measured by doing the same parts both ways. Fourth, what it refused and whether it was right to. The green strip is why it is worth doing even if the answer disappoints us.</a:t>
             </a:r>
           </a:p>
         </p:txBody>
@@ -735,7 +735,7 @@
           <a:lstStyle/>
           <a:p>
             <a:r>
-              <a:t>Six steps in the order they have to happen. Two worth pulling out. Step three is the settings list, signed off before anything gets costed with it. Step four is the safety checks, and I have given them a step of their own so they do not get folded into the connection work and squeezed. The blue box is useful for planning. Steps one and two can run at the same time, because standing up the measuring software does not depend on knowing how CAPEE is built. Only step five does.</a:t>
+              <a:t>Six steps, in the order they have to happen. Two are worth pulling out. Step three is the settings list. JLR reviews it and signs it off before anything is costed with it, so the judgements inside the tool are ours, not just mine. Step four is the safety checks. I have given them a step of their own so they do not get folded into the connection work and squeezed. Step five says AI stays off, which matches the build we have already given JLR. Nothing in Option one needs it. The blue box helps with planning. Steps one and two can run at the same time, because standing up the measuring software does not depend on knowing how CAPEE is built. Only step five does. The amber box is my suggestion for where to start: machined parts or pressings, because that is where most of our volume is and where we understand the shapes best.</a:t>
             </a:r>
           </a:p>
         </p:txBody>
@@ -805,7 +805,7 @@
           <a:lstStyle/>
           <a:p>
             <a:r>
-              <a:t>Option two is a different thing from Option one, and I want to be clear about that. Option one saves the engineer typing. Option two gives us something we do not have at all. Today we cost the parts we have time to cost. A basket of several hundred gets sampled or estimated by analogy, because there are not enough engineer-hours. Option two costs the whole basket in one run. The blue box is important. The agent marshals the run but it never sets a price. Every number still comes out of the same engine at the same rates. It does choose the inputs, though, so the geometry checks that run on the CAD route today have to be wired onto this one, and that is on the list on slide fifteen. The amber box is the honest position. The engine already works standalone and an agent already exists that can cost a part. What does not exist is the run itself.</a:t>
+              <a:t>Option two is a different thing from Option one, and I want to be clear about that. Option one saves the engineer typing. Option two gives us something we do not have at all. Today we cost the parts we have time to cost. A basket of several hundred gets sampled or estimated by analogy, because there are not enough engineer-hours. Option two costs the whole basket in one run. The blue box says how. The part type comes from the list or from the shape. The material comes from the list. Where the tool cannot decide, it stops and asks, and one answer covers every part with the same question. There is no AI in it, so it runs in the JLR build as it is. The amber box is the honest position. The run is built, but only as a command-line tool, and it has never been run on our parts or our rates.</a:t>
             </a:r>
           </a:p>
         </p:txBody>
@@ -875,7 +875,7 @@
           <a:lstStyle/>
           <a:p>
             <a:r>
-              <a:t>Here is what a run actually does and what it costs in machine time. The forty-part row is measured, this month, on our own production parts. A part takes between one and three seconds to measure depending on how big the file is. Running the rules and costing it takes half a thousandth of a second, so the measuring is the whole of it. Forty parts took thirty-one seconds on two workers with nothing reused, and the rows below that are that same rate carried forward, so five hundred parts is about six and a half minutes. The point of the blue strip at the bottom is that the computer is not the constraint here. Pulling together the part list, the CAD files and our own rate data is the work. The machine finishes while you are getting a coffee.</a:t>
+              <a:t>Here is what a run does, start to finish. A list goes in, with part numbers, CAD files, volumes and the region each part is made in. Each part is measured by the same engine as a single part. The rules fill the form. Anything the tool cannot decide becomes a question, and each question appears once, naming every part it blocks. Then the engine costs them, in the same eight buckets as the screens. Three files come out: the results, the open questions, and a run record. The table is about trust. The run record names the rate book it used, and every rate book is kept. So a run from last quarter can be redone on last quarter's rates. A region it does not know is refused rather than quietly costed as the UK. The blue strip is the honest point. The hard part is gathering our data. I have not timed a basket of JLR size, so I will not quote a run time.</a:t>
             </a:r>
           </a:p>
         </p:txBody>
@@ -945,7 +945,7 @@
           <a:lstStyle/>
           <a:p>
             <a:r>
-              <a:t>I would rather show you this list than have it come out later. Six things. The first two are the ones that would stop me signing off a bulk run for anything audited. The rate book today is a single row that gets overwritten, so change a rate and the old one is gone. And a costing is only kept if somebody saves it by hand, with nothing recording which rates produced it. Together that means a five-hundred-part run produces numbers you cannot reproduce next quarter. The third is smaller than it sounds: region and volume already work in the screens, they are just not passed through to the automated route. Fourth, gear does not reach the automated route at all, so a basket with gears in it would quietly skip them. Fifth is the geometry safety checks. They run on the CAD route today and the automated route only validates the fields, so they have to be wired on before anyone leaves a run unattended. Sixth is the run itself, which is the actual new build. The green strip is the good news. The engine needs no change. We checked that by running it on its own, outside the application.</a:t>
+              <a:t>Last time I showed you this slide it was a list of gaps. I would rather show you honestly where each one stands now. The first four are built. Every rate book is kept rather than overwritten, so a costing can name the book it used and be redone on it. Every bulk run writes a record of its inputs, answers and versions. One limit there: a costing done on the screen is still only kept if someone saves it. Region and volume now reach the bulk route, and so does gear, and the same geometry checks run on it. What is left is ours to do. The run has to be given JLR rates, loaded through the Rate Converter. Until then it uses the built-in book from June. And it needs a trial on a real basket. A screen is optional. The green strip is the reassurance. The bulk run is not a second costing engine. It calls the same one the screens use.</a:t>
             </a:r>
           </a:p>
         </p:txBody>
@@ -1015,7 +1015,7 @@
           <a:lstStyle/>
           <a:p>
             <a:r>
-              <a:t>This is the business case for Option two, and I have deliberately not put a pound figure on it, because an honest one needs two things we do not have yet: our own rate data and the accuracy number from Option one. What I can show is what changes in kind. Today we cost the parts we have hours for and scale up from a sample. With bulk costing every part in the basket gets costed from its own geometry, with the same rules and the same rates. The row I would draw your eye to is the last one. Today it is one engineer per part. With this it is one answer per question, applied across every part that question affects. And the amber box is the limit on all of it. Every row assumes the tool is accurate enough to leave running, and that is exactly what Option one measures.</a:t>
+              <a:t>This is the business case for Option two. I have deliberately not put a pound figure on it. An honest one needs two things we do not have yet: our own rate data loaded, and the accuracy number from Option one. What I can show is what changes in kind. Today we cost the parts we have hours for and scale up from a sample. With bulk costing, every part in the list is costed from its own geometry, with the same rules and the same rates. What we can say to a supplier changes too. Instead of this is our estimate, it becomes here is the build-up, part by part. The row I would draw your eye to is the last one. Today it is one engineer per part. With this it is one answer per question, applied to every part it affects. The amber box is the limit on all of it. Every row assumes the tool is accurate enough to leave running, and that is exactly what Option one measures.</a:t>
             </a:r>
           </a:p>
         </p:txBody>
@@ -1085,7 +1085,7 @@
           <a:lstStyle/>
           <a:p>
             <a:r>
-              <a:t>Six steps for Option two. Step one is our own rate data and it is worth starting whatever we decide, because both options need it. Steps two and three are the prerequisites I showed you two slides ago: a history of rate changes, and an automatic record of every costing. They are not part of the run itself, they are what makes a run mean anything three months later. Step four is a set of small things that are not optional: a basket costed at UK rates when it should have been Poland is just wrong, and the geometry checks have to run on this route too. Step five is the actual new build. Step six is a trial on a real basket, run beside how we cost today so we can compare.</a:t>
+              <a:t>Six steps for Option two. Step one is loading our own rates, and it is worth starting whatever we decide, because both options need it. The Rate Converter takes JLR's rate card as it is exported and needs no macros. Steps two and three used to be software gaps. They are not any more. The tool keeps every rate book and writes a record of every run. What is left is a decision for JLR: who may change rates, who signs them off, and whether the run record is enough for audit. Step four is a check, not a build. Region, volume, gear and the geometry checks are wired on, and we should confirm them on a few of our own parts. Step five is a choice. The run works from the command line, so a screen is only worth building if the team wants one. Step six is a trial on a real basket, run beside how we cost today so we can compare.</a:t>
             </a:r>
           </a:p>
         </p:txBody>
@@ -1155,7 +1155,7 @@
           <a:lstStyle/>
           <a:p>
             <a:r>
-              <a:t>The top half is fairly even and each option wins some rows. The two I would look at are the last two. Option one produces the accuracy figure that Option two leans on. And Option one is audit-ready today, because CAPEE keeps the record exactly as it does now, whereas Option two is not audit-ready until we have built the rate history and the costing record. Those two rows are the whole argument for doing them in this order.</a:t>
+              <a:t>This puts the two side by side. The top half is fairly even, and each option wins some rows. One row has changed since last time. Option two used to be the bigger software job. Now the run is built, so most of its remaining work is data, not code. Option one still needs the link into CAPEE, and that waits on IT. The two rows I would look at are the last two. Option one produces the accuracy figure that Option two leans on. And Option one is audit-ready today, because CAPEE keeps the record exactly as it does now. Option two does keep its own records now, with the rate book each run used. But nobody at JLR has reviewed them against what audit needs. Those two rows are the whole argument for doing them in this order.</a:t>
             </a:r>
           </a:p>
         </p:txBody>
@@ -1225,7 +1225,7 @@
           <a:lstStyle/>
           <a:p>
             <a:r>
-              <a:t>Eight items. The top one is the one that would stop me putting this in front of a supplier today, and approving the trial is what fixes it. The second is the one that would stop me signing off a bulk run for anything audited, and it is a build, not a mystery. The third is waiting on IT. The fourth is small but I have put it up because a basket costed at the wrong region is wrong in a way nobody would notice. And the last row is worth saying plainly: the tool is still being worked on, so for any trial we pin a version and stay on it. One clarification on the sixth row, because it always comes up: what goes out is the drawing PDF and rendered pictures of the shape. The CAD file itself never leaves the server, and the deterministic setting sends nothing at all.</a:t>
+              <a:t>Eight items. The top one is the one that would stop me putting this in front of a supplier today, and approving the trial is what fixes it. The second is waiting on IT. The third is new. The software gap on records is closed, but JLR audit has not looked at them, so we should ask them early. The fourth matters more than it looks. Until our own rate card is loaded, every cost uses the built-in rates from June, and those are not our rates. The sixth is about AI, because it always comes up. AI is off in the build we gave JLR, nothing is sent out, and neither option needs it. But turning it on is only a setting, so someone should own that switch. The last row is worth saying plainly. The tool is still being worked on, so for any trial we pin one version and stay on it.</a:t>
             </a:r>
           </a:p>
         </p:txBody>
@@ -1295,7 +1295,7 @@
           <a:lstStyle/>
           <a:p>
             <a:r>
-              <a:t>This is the ask, so I will put it first. I want approval to run a proof of concept inside CAPEE, on one part type, using parts we have already bought. What we need from JLR is on the second row and I will come back to it at the end. What it costs is our own time. There is no licence and nobody has to learn a new tool. CAPEE still does the costing on the same screens. It does have to be changed to take the numbers, and that sits on JLR's side of the work on slide six. The amber box is the honest bit and I would rather say it now than have it come out in questions. We have never compared this tool against a price we actually paid. That is the whole point of the proof of concept.</a:t>
+              <a:t>This is the ask, so I will put it first. I would like approval to run a proof of concept inside CAPEE, on one part type, using parts we have already bought. The table says what that involves. What we need from JLR is on the second row, and I will come back to it at the end. What it costs is our own time. There is no licence, and nobody has to learn a new tool, because CAPEE still does the costing on the same screens. CAPEE does have to be changed to accept the numbers, and that is JLR's side of the work. The amber box is the honest bit, and I would rather say it now than have it come out in questions. We have never compared this tool with a price we actually paid. We know the arithmetic is right, because it matches a hand calculation to under 0.01 percent. But right arithmetic on the wrong inputs is still wrong. That is what the trial finds out.</a:t>
             </a:r>
           </a:p>
         </p:txBody>
@@ -1365,7 +1365,7 @@
           <a:lstStyle/>
           <a:p>
             <a:r>
-              <a:t>Five things. The first is the one I will keep coming back to: thirty to fifty parts where we know what we paid. Purchase records are fine, I do not need anything new created. Without it I cannot tell anyone how accurate this is, and that is the first question we will get asked. The second is our own rates, and it is worth starting whatever you decide today because both options need it. The third is three questions to IT. The fourth is a security decision and either answer works for us. The fifth is a person and a part type for the trial. The green strip matters: the first two do not wait on anything decided in this room.</a:t>
+              <a:t>Five things. The first is the one I will keep coming back to: thirty to fifty parts where we know what we paid. Purchase records are fine. I do not need anything new created. Without them I cannot tell anyone how accurate this is, and that is the first question we will be asked. The second is our own rates. The Rate Converter can take our rate card as it is exported today, with no macros, so this is mostly gathering, not building. It is worth starting whatever you decide, because both options need it. The third is three questions to IT. The fourth is a simple agreement. AI stays off. Neither option needs it, and the build JLR has already runs without it. If we ever want the AI features, that is a separate conversation and a separate approval. The fifth is a person and a part type for the trial. And the green strip: the first two do not wait on anything decided here.</a:t>
             </a:r>
           </a:p>
         </p:txBody>
@@ -1435,7 +1435,7 @@
           <a:lstStyle/>
           <a:p>
             <a:r>
-              <a:t>Keep this one for anyone who wants to know how we know. Every claim was checked against the software or measured this month rather than assumed. Two worth pointing at. The costing gives the same answer every time, which sounds obvious but is not true of every tool. And the fifth row is the answer to the first question IT security will ask: we checked every line of the measuring software for internet connections and there are none. The amber box at the bottom is the one number I have deliberately left off every slide. The tool has an accuracy report, but nothing real has been loaded into it, so what it prints today means nothing. That is why ask number one is what it is.</a:t>
+              <a:t>Keep this one for anyone who wants to know how we know. Every claim in the pack was checked against the software this week rather than assumed. A few are worth pointing at. The engine's arithmetic matches a hand calculation to under 0.01 percent on a reference part. That proves the sums are right. It does not prove the price is right. Six real production parts are pinned, so we notice if a change moves them. The measuring makes no internet connection, and the Windows package only listens on the laptop itself. That is the answer to the first question IT security will ask. AI is switched off in that build. The amber box is the one number I have deliberately left off every slide: accuracy against real prices. The tool can learn from actual prices once they are logged, but none from JLR are in it yet. That is why ask number one is what it is.</a:t>
             </a:r>
           </a:p>
         </p:txBody>
@@ -1505,7 +1505,7 @@
           <a:lstStyle/>
           <a:p>
             <a:r>
-              <a:t>This is the problem we are trying to fix. Today an engineer opens the model, reads the drawing, and types the numbers in. How many numbers depends on the part. A machined part is twelve boxes. A pressing is sixty-nine. The time matters, but the second point matters more. Two of our engineers costing the same part will not type the same numbers, so we end up with two answers for one part and no way to say which is right. On the right is what the tool does instead. A hundred and sixty-five costing rules turn the measurements into the values the form needs, and a hundred and forty-nine of those write straight into a named box. One part uses its own type's rules, between nine and eighteen of them. The blue box is the distinction I want people to hold on to. Measuring the model is ordinary software doing geometry. The AI reads the drawing and looks at rendered pictures of the shape, and we check everything it gives back against the measurements.</a:t>
+              <a:t>This is the problem we are trying to fix. Today an engineer opens the model, reads the drawing and types the numbers in. How many depends on the part. On CostVision's own forms it runs from about twelve values to about seventy. I have not counted CAPEE's screens, so take that as a guide. The time matters, but the second point matters more. Two engineers costing the same part will not type the same numbers. So we get two answers for one part and no way to say which is right. On the right is what the tool does. It measures the model. Fixed rules turn the measurements into the values the form needs. Where the shape cannot decide something, such as the material, it asks the engineer rather than guessing. The blue box is the point I would like people to hold on to. Measuring is ordinary geometry software, not AI. The AI is switched off in the JLR build. Everything on this slide works without it.</a:t>
             </a:r>
           </a:p>
         </p:txBody>
@@ -1575,7 +1575,7 @@
           <a:lstStyle/>
           <a:p>
             <a:r>
-              <a:t>Before the options, this is honestly where the tool is. Left side is working today and I checked every line of it against the software this week. Nineteen part types cost through the engine. The maths repeats. It measures models with no internet connection, which is the first thing IT security will ask about. Right side is what is not done. The top one is the important one and I will keep coming back to it. Below that, it does not keep a history when someone changes a rate, and it keeps no automatic record of a costing. Somebody can save a scenario or make a share link, but nothing ties either to the rates that produced it, so today you could not reproduce a costing from three months ago. Those two matter a lot for Option two and I will come back to them. The blue box is what has changed since I last showed you this. The headline is that it now refuses work it cannot do honestly.</a:t>
+              <a:t>Before the options, this is honestly where the tool is. I checked every line on this slide against the software this week. On the left is what works today. It covers nineteen manufacturing processes, and thirteen of them can be costed straight from a CAD file. Same inputs always give the same answer. It measures models with no internet, which is the first thing IT security will ask about. It has a proper test net: 2,438 automated tests, and six real production parts pinned so that a change which moves any of them fails the build. On the right is what is not done. The top line is the important one and I will keep coming back to it. There is no link into CAPEE yet, and no JLR single sign-on. The bulk run works, but only from the command line. The blue box is what has changed since I last showed you this. Most of the gaps I listed for Option two then are now closed. I will show you which on slide fifteen.</a:t>
             </a:r>
           </a:p>
         </p:txBody>
@@ -1645,7 +1645,7 @@
           <a:lstStyle/>
           <a:p>
             <a:r>
-              <a:t>This is the shape of the whole thing. Do Option one first, prove it on our own parts, look at the number, then decide about Option two. Option one is the smaller change. CAPEE does not move. The engineer stops typing and starts checking. Option two is a different capability altogether. Instead of costing the parts we have time for, we cost the whole basket. The reason for this order is on the green strip. Option one is cheap to try and it gives us the accuracy figure. There is no sense costing five hundred parts until we know the tool gets one part right.</a:t>
+              <a:t>This is the shape of the whole thing. We do Option one first, prove it on our own parts, look at the number, and then decide about Option two. Option one is the smaller change. CAPEE does not move. The engineer stops typing and starts checking. What we hand over is the measuring engine, the rules that fill the form, and the checks, and slide seven lists them. Option two is a different capability. Instead of costing the parts we have time for, we cost the whole basket. The run for that is already built, and it uses no AI. What is left is loading our own rates, trying it on a real basket, and maybe a screen for it. The reason for this order is on the green strip. Option one is cheap to try and it gives us the accuracy figure. There is no sense costing five hundred parts until we know the tool gets one part right.</a:t>
             </a:r>
           </a:p>
         </p:txBody>
@@ -1715,7 +1715,7 @@
           <a:lstStyle/>
           <a:p>
             <a:r>
-              <a:t>Option one on one slide. Top row is what happens each time somebody costs a part. The engineer hands over the model and drawing from inside CAPEE. Software measures the model, the AI reads the drawing, the checks compare the two. A few things no model can show, like heat treatment, the engineer confirms. Then CAPEE gets the numbers and costs the part exactly as it does now. Underneath is the build order and who does what. I have deliberately not put weeks against these. Nobody has sized this yet, and the connection step in particular waits on an answer we do not have.</a:t>
+              <a:t>This is Option one on a single slide. The top row is what happens each time somebody costs a part. The engineer hands over the 3D model from inside CAPEE. The software measures it. Fixed rules turn the measurements into the values CAPEE needs. The checks look for contradictions, and a serious one stops the costing until someone accepts it. The engineer confirms what a model cannot show, like material and heat treatment. Then CAPEE costs the part exactly as it does now. There is no AI anywhere in that row. Underneath is the build order and who does what. We package the software, write out the settings and bring the checks across. JLR tells us how CAPEE is built, provides a server or a laptop, and changes CAPEE to take the numbers. I have deliberately not put weeks against any of this. Nobody has sized it, and the connection step waits on an answer we do not have yet.</a:t>
             </a:r>
           </a:p>
         </p:txBody>
@@ -1785,7 +1785,7 @@
           <a:lstStyle/>
           <a:p>
             <a:r>
-              <a:t>You asked last time what would actually get handed over. Six things, and the sizes come straight out of the software. The measuring engine is Python, which is the normal choice for measurement work. The rest is TypeScript, common in business software. Neither is odd and neither ties us to one supplier. The fourth row is the biggest piece and it is worth a word: that is the hundred and sixty-five costing rules that fill the form and decide what to ask the engineer for. The amber box is the one practical thing worth raising with IT now, because it decides where this can live.</a:t>
+              <a:t>You asked last time what would actually be handed over. Here it is, and the sizes come from counting the source files this week, rounded. The measuring engine is Python, the normal choice for measurement work. The rules and checks are TypeScript, which is common in business software. Neither is unusual, and neither ties JLR to us. The rules are the biggest piece. They turn the measurements into cost inputs and decide what to ask the engineer. The bulk run is there for Option two. The settings list does not exist yet as a separate file, and writing it is a step in the plan. The Rate Converter is an Excel workbook with no macros, which turns JLR's own rate card into the tool's format. The amber box is the practical point for IT. The measuring engine needs a standard Linux server or our Windows package. The cut-down Linux image cannot run it. That decides where this can live, so it is worth settling early.</a:t>
             </a:r>
           </a:p>
         </p:txBody>
@@ -1855,7 +1855,7 @@
           <a:lstStyle/>
           <a:p>
             <a:r>
-              <a:t>On a job like this the temptation is to take the measuring and the AI and leave what looks like plumbing until later. These four checks are what make the rest safe. The first one is the one to remember. If the AI claims a heavier part than the model measures, the model wins. A disagreement the other way is flagged to the engineer, and a big gap stops the costing. The last one matters for a different reason. Where the tool cannot know something it asks rather than guessing, and it never pre-ticks its own answer. The red box is from our own review. We found a route with no checks that gave back a nonsense figure while saying it had worked, and we found that a part exported as surfaces got costed at a wrong weight. Both of those now stop rather than produce a number.</a:t>
+              <a:t>On a job like this it is tempting to take the measuring and leave what looks like plumbing until later. These four checks are what make the rest safe. The price is always plain arithmetic, but a wrong input still gives a wrong price. The first check is the one to remember. The measured model is the ground truth. If anything fed to the cost contradicts the measured weight, it is flagged, and a big gap stops the costing. The second stops a thick, chunky part being costed as a pressing or a moulding. The third caps machining time on castings and forgings. The fourth is about honesty. Where the tool cannot know something, it asks rather than guessing. The red box is a lesson we learned the hard way. A steering knuckle once came out at five pounds forty-three while every test passed, because our tests used clean made-up shapes. Now six real production parts are pinned, and if a change moves any of them, the build fails.</a:t>
             </a:r>
           </a:p>
         </p:txBody>
@@ -1925,7 +1925,7 @@
           <a:lstStyle/>
           <a:p>
             <a:r>
-              <a:t>Hardcoded values is a phrase that means nothing on its own, so here are six real ones. Look at the third row. Stripping and re-plating a rejected part is costed as its own stage, at two dollars twenty of chemistry and one dollar eighty of effluent per square metre, charged on top of plating the part again. The note written against it says the whole rework runs four to five times a first-pass part, which is why a three percent reject rate is nearer twelve to fifteen percent on cost. That is an engineering judgement and exactly the sort of thing you would challenge in a review, so it should not be buried in code. We pull every one of them into a single list you can read and change. The amber box is the caveat. These are our estimates, not measurements from one of our plants.</a:t>
+              <a:t>Hardcoded values means nothing on its own, so here are six real ones, read off the software this month. The first two decide what counts as a machined face and what counts as a pocket. Look at the third row. Stripping and re-plating a rejected part is costed as its own stage: two dollars twenty of chemistry and one dollar eighty of effluent per square metre, on top of plating the part again. The note against it says the rework runs four to five times a first-pass part. That is why a three percent reject rate is nearer twelve to fifteen percent on cost. That is an engineering judgement, and exactly the sort of thing you would challenge in a review. So it should not be buried in code. We will pull every one of these into a single list you can read and change. The amber box is the caveat. These are our estimates, not measurements from one of our plants.</a:t>
             </a:r>
           </a:p>
         </p:txBody>
@@ -5153,7 +5153,7 @@
                 </a:solidFill>
                 <a:latin typeface="Calibri"/>
               </a:rPr>
-              <a:t>AI  COST  INTELLIGENCE</a:t>
+              <a:t>SHOULD-COST  ENGINEERING</a:t>
             </a:r>
           </a:p>
         </p:txBody>
@@ -5237,7 +5237,7 @@
                 </a:solidFill>
                 <a:latin typeface="Calibri"/>
               </a:rPr>
-              <a:t>The business case for automating cost input, and then costing in bulk</a:t>
+              <a:t>The case for automating cost input, and then costing in bulk</a:t>
             </a:r>
           </a:p>
         </p:txBody>
@@ -5418,7 +5418,7 @@
                 </a:solidFill>
                 <a:latin typeface="Calibri"/>
               </a:rPr>
-              <a:t>CAPEE keeps doing the costing. CostVision reads the numbers off the 3D model and the drawing and fills them in. We prove it on real JLR parts first.</a:t>
+              <a:t>CAPEE keeps doing the costing. CostVision measures the 3D model and fills in the numbers. We prove it on real JLR parts first.</a:t>
             </a:r>
           </a:p>
         </p:txBody>
@@ -5513,7 +5513,7 @@
                 </a:solidFill>
                 <a:latin typeface="Calibri"/>
               </a:rPr>
-              <a:t>Cost in bulk, run by an agent</a:t>
+              <a:t>Cost in bulk, unattended</a:t>
             </a:r>
           </a:p>
         </p:txBody>
@@ -5555,7 +5555,7 @@
                 </a:solidFill>
                 <a:latin typeface="Calibri"/>
               </a:rPr>
-              <a:t>A whole basket of parts costed in one run, unattended, with a person asked only where the geometry genuinely cannot decide.</a:t>
+              <a:t>A whole basket of parts costed in one run, with no AI. A person is asked only where the geometry cannot decide.</a:t>
             </a:r>
           </a:p>
         </p:txBody>
@@ -5798,7 +5798,7 @@
                 </a:solidFill>
                 <a:latin typeface="Calibri"/>
               </a:rPr>
-              <a:t>AI  COST  INTELLIGENCE</a:t>
+              <a:t>SHOULD-COST  ENGINEERING</a:t>
             </a:r>
           </a:p>
         </p:txBody>
@@ -5968,7 +5968,7 @@
                 </a:solidFill>
                 <a:latin typeface="Calibri"/>
               </a:rPr>
-              <a:t>We do not know yet how CAPEE is built. All three routes work. The answer decides which one we use and how much effort it takes.</a:t>
+              <a:t>We do not know yet how CAPEE is built. Any of the three routes could work. The answer decides which one we use and how much effort it takes.</a:t>
             </a:r>
           </a:p>
         </p:txBody>
@@ -7716,7 +7716,7 @@
                 </a:solidFill>
                 <a:latin typeface="Calibri"/>
               </a:rPr>
-              <a:t>What is CAPEE written in. Can it call another service on the network. Can it run on a normal Linux server.</a:t>
+              <a:t>What is CAPEE written in. Can it call another service on the network. Where can the measuring engine run: a server, or a laptop.</a:t>
             </a:r>
           </a:p>
         </p:txBody>
@@ -7959,7 +7959,7 @@
                 </a:solidFill>
                 <a:latin typeface="Calibri"/>
               </a:rPr>
-              <a:t>AI  COST  INTELLIGENCE</a:t>
+              <a:t>SHOULD-COST  ENGINEERING</a:t>
             </a:r>
           </a:p>
         </p:txBody>
@@ -8358,7 +8358,7 @@
                 </a:solidFill>
                 <a:latin typeface="Calibri"/>
               </a:rPr>
-              <a:t>Cost every part with the tool, compare against the price we actually paid, and report the average error. The test is whether the real error lands inside the range the tool itself predicted for each part. A tool that is wrong and says so is usable. One that is wrong and confident is not.</a:t>
+              <a:t>Cost every part with the tool, compare against the price we actually paid, and report the average error. The test is whether the real price lands inside the range the tool itself gave for each part. A tool that is wrong and says so is usable. One that is wrong and confident is not.</a:t>
             </a:r>
           </a:p>
         </p:txBody>
@@ -8587,7 +8587,7 @@
                 </a:solidFill>
                 <a:latin typeface="Calibri"/>
               </a:rPr>
-              <a:t>Count the values the engineer changed after the tool filled them, and the parts where the tool stopped and asked. On our own eight parts, with the material family given, six costed straight through and two stopped. Without it all eight stop, because a solid model cannot tell steel from aluminium. We need that figure on JLR parts, not ours.</a:t>
+              <a:t>Count the values the engineer changed after the tool filled them, and the parts where the tool stopped and asked. Every part will ask for the material family, because a solid model cannot tell steel from aluminium. The rest we need to measure on JLR parts.</a:t>
             </a:r>
           </a:p>
         </p:txBody>
@@ -9420,7 +9420,7 @@
                 </a:solidFill>
                 <a:latin typeface="Calibri"/>
               </a:rPr>
-              <a:t>AI  COST  INTELLIGENCE</a:t>
+              <a:t>SHOULD-COST  ENGINEERING</a:t>
             </a:r>
           </a:p>
         </p:txBody>
@@ -10006,7 +10006,7 @@
                 </a:solidFill>
                 <a:latin typeface="Calibri"/>
               </a:rPr>
-              <a:t>Install it on a JLR server. Measure 20 real JLR parts and check the results against their drawings.</a:t>
+              <a:t>Install it on a JLR server or laptop. Measure 20 real JLR parts and check the results against their drawings.</a:t>
             </a:r>
           </a:p>
         </p:txBody>
@@ -10464,7 +10464,7 @@
                 </a:solidFill>
                 <a:latin typeface="Calibri"/>
               </a:rPr>
-              <a:t>The four checks and the questions the engineer confirms. In the scope from the start.</a:t>
+              <a:t>The geometry checks and the questions the engineer confirms. In the scope from the start.</a:t>
             </a:r>
           </a:p>
         </p:txBody>
@@ -10693,7 +10693,7 @@
                 </a:solidFill>
                 <a:latin typeface="Calibri"/>
               </a:rPr>
-              <a:t>Wire it in. Route the drawing reading through a JLR-approved AI service. Cost one real part end to end.</a:t>
+              <a:t>Wire it in, with AI left off. Cost one real part end to end.</a:t>
             </a:r>
           </a:p>
         </p:txBody>
@@ -11096,7 +11096,7 @@
                 </a:solidFill>
                 <a:latin typeface="Calibri"/>
               </a:rPr>
-              <a:t>Standing up the measuring software does not depend on knowing how CAPEE is built. Only step 5 does.</a:t>
+              <a:t>Measuring does not depend on how CAPEE is built. Only step 5 does.</a:t>
             </a:r>
           </a:p>
         </p:txBody>
@@ -11270,7 +11270,7 @@
                 </a:solidFill>
                 <a:latin typeface="Calibri"/>
               </a:rPr>
-              <a:t>Machined parts or pressings first. Most of our volume and the shapes we understand best. Widen it once it holds up.</a:t>
+              <a:t>Machined parts or pressings first. Widen it once it holds up.</a:t>
             </a:r>
           </a:p>
         </p:txBody>
@@ -11471,7 +11471,7 @@
                 </a:solidFill>
                 <a:latin typeface="Calibri"/>
               </a:rPr>
-              <a:t>AI  COST  INTELLIGENCE</a:t>
+              <a:t>SHOULD-COST  ENGINEERING</a:t>
             </a:r>
           </a:p>
         </p:txBody>
@@ -11599,7 +11599,7 @@
                 </a:solidFill>
                 <a:latin typeface="Cambria"/>
               </a:rPr>
-              <a:t>Option 2: costing in bulk, run by an agent</a:t>
+              <a:t>Option 2: costing in bulk, unattended</a:t>
             </a:r>
           </a:p>
         </p:txBody>
@@ -12133,7 +12133,7 @@
                 </a:solidFill>
                 <a:latin typeface="Calibri"/>
               </a:rPr>
-              <a:t>genuinely cannot decide, and only once per question.</a:t>
+              <a:t>cannot decide, and only once per question.</a:t>
             </a:r>
           </a:p>
           <a:p>
@@ -12162,7 +12162,7 @@
                 </a:solidFill>
                 <a:latin typeface="Calibri"/>
               </a:rPr>
-              <a:t>Same engine and the same rate book. The geometry</a:t>
+              <a:t>Same engine, same rate book, same geometry checks.</a:t>
             </a:r>
           </a:p>
           <a:p>
@@ -12181,7 +12181,7 @@
                 </a:solidFill>
                 <a:latin typeface="Calibri"/>
               </a:rPr>
-              <a:t>checks have to be wired onto this route.</a:t>
+              <a:t>No AI anywhere in it.</a:t>
             </a:r>
           </a:p>
         </p:txBody>
@@ -12313,7 +12313,7 @@
                 </a:solidFill>
                 <a:latin typeface="Calibri"/>
               </a:rPr>
-              <a:t>What the agent actually does, and what it does not</a:t>
+              <a:t>What the run does, and what it does not</a:t>
             </a:r>
           </a:p>
         </p:txBody>
@@ -12355,7 +12355,7 @@
                 </a:solidFill>
                 <a:latin typeface="Calibri"/>
               </a:rPr>
-              <a:t>The agent marshals the run. It picks the part type, answers what it can from the drawing, and escalates what it cannot. Every number still comes from the same deterministic engine at the same rates. The agent never sets a price, but it does choose the inputs, so the geometry checks that run on the CAD route today have to be wired onto this route before a run is left unattended.</a:t>
+              <a:t>The part type comes from the list or from the measured shape. The material comes from the list. Where it cannot decide, it stops and asks rather than guessing. It never sets a price: every number comes from the same engine at the same rates. There is no AI in it, so it works in the JLR build.</a:t>
             </a:r>
           </a:p>
         </p:txBody>
@@ -12529,7 +12529,7 @@
                 </a:solidFill>
                 <a:latin typeface="Calibri"/>
               </a:rPr>
-              <a:t>The engine is already callable on its own, and there is already an agent that can cost a part when asked. What does not exist is the run itself: a list going in, a record coming out, and a way to reproduce it later. Slide 15 sets out exactly what has to be built.</a:t>
+              <a:t>The run is built as a command-line tool. It writes the results, the open questions and a record naming the rate book it used. It has not yet been run on a JLR basket or on JLR rates, and there is no screen for it yet.</a:t>
             </a:r>
           </a:p>
         </p:txBody>
@@ -12730,7 +12730,7 @@
                 </a:solidFill>
                 <a:latin typeface="Calibri"/>
               </a:rPr>
-              <a:t>AI  COST  INTELLIGENCE</a:t>
+              <a:t>SHOULD-COST  ENGINEERING</a:t>
             </a:r>
           </a:p>
         </p:txBody>
@@ -13432,7 +13432,7 @@
                 </a:solidFill>
                 <a:latin typeface="Calibri"/>
               </a:rPr>
-              <a:t>Same engine as a single part, run in parallel</a:t>
+              <a:t>Same engine as a single part, in parallel</a:t>
             </a:r>
           </a:p>
         </p:txBody>
@@ -14542,7 +14542,7 @@
                 </a:solidFill>
                 <a:latin typeface="Calibri"/>
               </a:rPr>
-              <a:t>One report out</a:t>
+              <a:t>Three files out</a:t>
             </a:r>
           </a:p>
         </p:txBody>
@@ -14584,7 +14584,7 @@
                 </a:solidFill>
                 <a:latin typeface="Calibri"/>
               </a:rPr>
-              <a:t>Per part and per basket, with what was assumed</a:t>
+              <a:t>Results, open questions and a run record</a:t>
             </a:r>
           </a:p>
         </p:txBody>
@@ -14626,7 +14626,7 @@
                 </a:solidFill>
                 <a:latin typeface="Calibri"/>
               </a:rPr>
-              <a:t>How long a run takes. The 40-part row was measured this month; the rest carries that rate forward</a:t>
+              <a:t>What a run produces, and how it stays honest</a:t>
             </a:r>
           </a:p>
         </p:txBody>
@@ -14798,7 +14798,7 @@
                 </a:solidFill>
                 <a:latin typeface="Calibri"/>
               </a:rPr>
-              <a:t>Measured</a:t>
+              <a:t>In short</a:t>
             </a:r>
           </a:p>
         </p:txBody>
@@ -14884,7 +14884,7 @@
                 </a:solidFill>
                 <a:latin typeface="Calibri"/>
               </a:rPr>
-              <a:t>Basis</a:t>
+              <a:t>Detail</a:t>
             </a:r>
           </a:p>
         </p:txBody>
@@ -14972,7 +14972,7 @@
                 </a:solidFill>
                 <a:latin typeface="Calibri"/>
               </a:rPr>
-              <a:t>Measure one part, warm</a:t>
+              <a:t>Results file</a:t>
             </a:r>
           </a:p>
         </p:txBody>
@@ -15060,7 +15060,7 @@
                 </a:solidFill>
                 <a:latin typeface="Calibri"/>
               </a:rPr>
-              <a:t>0.9 to 3.1 seconds</a:t>
+              <a:t>One row per part</a:t>
             </a:r>
           </a:p>
         </p:txBody>
@@ -15148,7 +15148,7 @@
                 </a:solidFill>
                 <a:latin typeface="Calibri"/>
               </a:rPr>
-              <a:t>Five real production parts, 0.6 MB to 3.0 MB. Bigger file, longer</a:t>
+              <a:t>The eight cost buckets and the total</a:t>
             </a:r>
           </a:p>
         </p:txBody>
@@ -15236,7 +15236,7 @@
                 </a:solidFill>
                 <a:latin typeface="Calibri"/>
               </a:rPr>
-              <a:t>Run the rules and cost it</a:t>
+              <a:t>Questions file</a:t>
             </a:r>
           </a:p>
         </p:txBody>
@@ -15324,7 +15324,7 @@
                 </a:solidFill>
                 <a:latin typeface="Calibri"/>
               </a:rPr>
-              <a:t>under 1 millisecond</a:t>
+              <a:t>Each open question once</a:t>
             </a:r>
           </a:p>
         </p:txBody>
@@ -15412,7 +15412,7 @@
                 </a:solidFill>
                 <a:latin typeface="Calibri"/>
               </a:rPr>
-              <a:t>Rules 0.5 ms, eight-bucket engine 0.01 ms. Not the slow part</a:t>
+              <a:t>Names every part it blocks, and the answer that clears them</a:t>
             </a:r>
           </a:p>
         </p:txBody>
@@ -15500,7 +15500,7 @@
                 </a:solidFill>
                 <a:latin typeface="Calibri"/>
               </a:rPr>
-              <a:t>40 parts</a:t>
+              <a:t>Run record</a:t>
             </a:r>
           </a:p>
         </p:txBody>
@@ -15588,7 +15588,7 @@
                 </a:solidFill>
                 <a:latin typeface="Calibri"/>
               </a:rPr>
-              <a:t>31 seconds</a:t>
+              <a:t>The durable record</a:t>
             </a:r>
           </a:p>
         </p:txBody>
@@ -15676,7 +15676,7 @@
                 </a:solidFill>
                 <a:latin typeface="Calibri"/>
               </a:rPr>
-              <a:t>Measured. Two workers, nothing reused from cache</a:t>
+              <a:t>Inputs, answers, and the rule and rate-book versions used</a:t>
             </a:r>
           </a:p>
         </p:txBody>
@@ -15764,7 +15764,7 @@
                 </a:solidFill>
                 <a:latin typeface="Calibri"/>
               </a:rPr>
-              <a:t>100 parts</a:t>
+              <a:t>Region</a:t>
             </a:r>
           </a:p>
         </p:txBody>
@@ -15852,7 +15852,7 @@
                 </a:solidFill>
                 <a:latin typeface="Calibri"/>
               </a:rPr>
-              <a:t>about 1.5 minutes</a:t>
+              <a:t>Rate book rebuilt for it</a:t>
             </a:r>
           </a:p>
         </p:txBody>
@@ -15940,7 +15940,7 @@
                 </a:solidFill>
                 <a:latin typeface="Calibri"/>
               </a:rPr>
-              <a:t>That measured rate, on two workers</a:t>
+              <a:t>A region it does not know is refused, not guessed</a:t>
             </a:r>
           </a:p>
         </p:txBody>
@@ -16028,7 +16028,7 @@
                 </a:solidFill>
                 <a:latin typeface="Calibri"/>
               </a:rPr>
-              <a:t>500 parts</a:t>
+              <a:t>Geometry checks</a:t>
             </a:r>
           </a:p>
         </p:txBody>
@@ -16116,7 +16116,7 @@
                 </a:solidFill>
                 <a:latin typeface="Calibri"/>
               </a:rPr>
-              <a:t>about 6.5 minutes</a:t>
+              <a:t>Same as a single part</a:t>
             </a:r>
           </a:p>
         </p:txBody>
@@ -16204,7 +16204,7 @@
                 </a:solidFill>
                 <a:latin typeface="Calibri"/>
               </a:rPr>
-              <a:t>Two workers. Roughly half that on four</a:t>
+              <a:t>A part that fails one is refused unless someone accepts it</a:t>
             </a:r>
           </a:p>
         </p:txBody>
@@ -16292,7 +16292,7 @@
                 </a:solidFill>
                 <a:latin typeface="Calibri"/>
               </a:rPr>
-              <a:t>1,000 parts</a:t>
+              <a:t>Past rate books</a:t>
             </a:r>
           </a:p>
         </p:txBody>
@@ -16380,7 +16380,7 @@
                 </a:solidFill>
                 <a:latin typeface="Calibri"/>
               </a:rPr>
-              <a:t>about 13 minutes</a:t>
+              <a:t>All kept</a:t>
             </a:r>
           </a:p>
         </p:txBody>
@@ -16468,7 +16468,7 @@
                 </a:solidFill>
                 <a:latin typeface="Calibri"/>
               </a:rPr>
-              <a:t>Two workers. Roughly half that on four</a:t>
+              <a:t>Last quarter’s run can be redone on last quarter’s rates</a:t>
             </a:r>
           </a:p>
         </p:txBody>
@@ -16600,7 +16600,7 @@
                 </a:solidFill>
                 <a:latin typeface="Calibri"/>
               </a:rPr>
-              <a:t>The machine time is not the constraint</a:t>
+              <a:t>The data is the work</a:t>
             </a:r>
           </a:p>
         </p:txBody>
@@ -16642,7 +16642,7 @@
                 </a:solidFill>
                 <a:latin typeface="Calibri"/>
               </a:rPr>
-              <a:t>Getting the part list, the CAD files and the rate data together is the work. The computer finishes in minutes.</a:t>
+              <a:t>Getting the part list, the CAD files and our own rates together is the real effort. We have not yet timed a JLR-sized basket.</a:t>
             </a:r>
           </a:p>
         </p:txBody>
@@ -16843,7 +16843,7 @@
                 </a:solidFill>
                 <a:latin typeface="Calibri"/>
               </a:rPr>
-              <a:t>AI  COST  INTELLIGENCE</a:t>
+              <a:t>SHOULD-COST  ENGINEERING</a:t>
             </a:r>
           </a:p>
         </p:txBody>
@@ -16971,7 +16971,7 @@
                 </a:solidFill>
                 <a:latin typeface="Cambria"/>
               </a:rPr>
-              <a:t>Option 2: what has to be built first</a:t>
+              <a:t>Option 2: what is built, and what is left</a:t>
             </a:r>
           </a:p>
         </p:txBody>
@@ -17013,7 +17013,7 @@
                 </a:solidFill>
                 <a:latin typeface="Calibri"/>
               </a:rPr>
-              <a:t>These are the honest gaps. None of them is large on its own, and none of them is optional.</a:t>
+              <a:t>Most of the gaps on this list last time are now closed. This is where each one stands.</a:t>
             </a:r>
           </a:p>
         </p:txBody>
@@ -17099,7 +17099,7 @@
                 </a:solidFill>
                 <a:latin typeface="Calibri"/>
               </a:rPr>
-              <a:t>What is missing</a:t>
+              <a:t>Item</a:t>
             </a:r>
           </a:p>
         </p:txBody>
@@ -17185,7 +17185,7 @@
                 </a:solidFill>
                 <a:latin typeface="Calibri"/>
               </a:rPr>
-              <a:t>Why it matters</a:t>
+              <a:t>Status</a:t>
             </a:r>
           </a:p>
         </p:txBody>
@@ -17533,7 +17533,7 @@
                 </a:solidFill>
                 <a:latin typeface="Calibri"/>
               </a:rPr>
-              <a:t>Blocks audit</a:t>
+              <a:t>Built</a:t>
             </a:r>
           </a:p>
         </p:txBody>
@@ -17621,7 +17621,7 @@
                 </a:solidFill>
                 <a:latin typeface="Calibri"/>
               </a:rPr>
-              <a:t>Today the rate book is one row that gets overwritten. Change a rate and the old one is gone. A bulk run costed at rates nobody can recover is not defensible.</a:t>
+              <a:t>Every rate book is kept, not overwritten. A costing can name the book it used and be redone on it.</a:t>
             </a:r>
           </a:p>
         </p:txBody>
@@ -17705,11 +17705,11 @@
             <a:r>
               <a:rPr sz="980" b="1" i="0">
                 <a:solidFill>
-                  <a:srgbClr val="B03A2E"/>
-                </a:solidFill>
-                <a:latin typeface="Calibri"/>
-              </a:rPr>
-              <a:t>Must have</a:t>
+                  <a:srgbClr val="2A7F50"/>
+                </a:solidFill>
+                <a:latin typeface="Calibri"/>
+              </a:rPr>
+              <a:t>Done</a:t>
             </a:r>
           </a:p>
         </p:txBody>
@@ -17797,7 +17797,7 @@
                 </a:solidFill>
                 <a:latin typeface="Calibri"/>
               </a:rPr>
-              <a:t>An automatic record of every costing</a:t>
+              <a:t>A record of every bulk run</a:t>
             </a:r>
           </a:p>
         </p:txBody>
@@ -17885,7 +17885,7 @@
                 </a:solidFill>
                 <a:latin typeface="Calibri"/>
               </a:rPr>
-              <a:t>Blocks audit</a:t>
+              <a:t>Built</a:t>
             </a:r>
           </a:p>
         </p:txBody>
@@ -17973,7 +17973,7 @@
                 </a:solidFill>
                 <a:latin typeface="Calibri"/>
               </a:rPr>
-              <a:t>A costing is kept only if somebody saves a scenario or makes a share link, which expires. Nothing is recorded automatically and nothing names the rates used, so a five-hundred-part run could not be reproduced.</a:t>
+              <a:t>Each run writes a record: inputs, answers, rule and rate-book versions. A costing done on screen is still kept only if someone saves it.</a:t>
             </a:r>
           </a:p>
         </p:txBody>
@@ -18057,11 +18057,11 @@
             <a:r>
               <a:rPr sz="980" b="1" i="0">
                 <a:solidFill>
-                  <a:srgbClr val="B03A2E"/>
-                </a:solidFill>
-                <a:latin typeface="Calibri"/>
-              </a:rPr>
-              <a:t>Must have</a:t>
+                  <a:srgbClr val="2A7F50"/>
+                </a:solidFill>
+                <a:latin typeface="Calibri"/>
+              </a:rPr>
+              <a:t>Done</a:t>
             </a:r>
           </a:p>
         </p:txBody>
@@ -18149,7 +18149,7 @@
                 </a:solidFill>
                 <a:latin typeface="Calibri"/>
               </a:rPr>
-              <a:t>Region and volume on the automated route</a:t>
+              <a:t>Region and volume on the bulk route</a:t>
             </a:r>
           </a:p>
         </p:txBody>
@@ -18237,7 +18237,7 @@
                 </a:solidFill>
                 <a:latin typeface="Calibri"/>
               </a:rPr>
-              <a:t>Blocks correctness</a:t>
+              <a:t>Built</a:t>
             </a:r>
           </a:p>
         </p:txBody>
@@ -18325,7 +18325,7 @@
                 </a:solidFill>
                 <a:latin typeface="Calibri"/>
               </a:rPr>
-              <a:t>The automated route always uses the UK rate book and never gets told the annual volume. Both already work in the screens; they are simply not passed through.</a:t>
+              <a:t>A region rebuilds the whole rate book for that country. Volume can be set per part or for the whole run.</a:t>
             </a:r>
           </a:p>
         </p:txBody>
@@ -18409,11 +18409,11 @@
             <a:r>
               <a:rPr sz="980" b="1" i="0">
                 <a:solidFill>
-                  <a:srgbClr val="B03A2E"/>
-                </a:solidFill>
-                <a:latin typeface="Calibri"/>
-              </a:rPr>
-              <a:t>Must have</a:t>
+                  <a:srgbClr val="2A7F50"/>
+                </a:solidFill>
+                <a:latin typeface="Calibri"/>
+              </a:rPr>
+              <a:t>Done</a:t>
             </a:r>
           </a:p>
         </p:txBody>
@@ -18501,7 +18501,7 @@
                 </a:solidFill>
                 <a:latin typeface="Calibri"/>
               </a:rPr>
-              <a:t>Gear on the automated route</a:t>
+              <a:t>Gear and the geometry checks on the bulk route</a:t>
             </a:r>
           </a:p>
         </p:txBody>
@@ -18589,7 +18589,7 @@
                 </a:solidFill>
                 <a:latin typeface="Calibri"/>
               </a:rPr>
-              <a:t>Blocks coverage</a:t>
+              <a:t>Built</a:t>
             </a:r>
           </a:p>
         </p:txBody>
@@ -18677,7 +18677,7 @@
                 </a:solidFill>
                 <a:latin typeface="Calibri"/>
               </a:rPr>
-              <a:t>Gear costs in the screens and has its own rules, but the automated route cannot reach it. A basket with gears in it would silently skip them.</a:t>
+              <a:t>Gear is costed the same way on both routes. The same checks run, and a part that fails one is refused.</a:t>
             </a:r>
           </a:p>
         </p:txBody>
@@ -18761,11 +18761,11 @@
             <a:r>
               <a:rPr sz="980" b="1" i="0">
                 <a:solidFill>
-                  <a:srgbClr val="99651A"/>
-                </a:solidFill>
-                <a:latin typeface="Calibri"/>
-              </a:rPr>
-              <a:t>Must have</a:t>
+                  <a:srgbClr val="2A7F50"/>
+                </a:solidFill>
+                <a:latin typeface="Calibri"/>
+              </a:rPr>
+              <a:t>Done</a:t>
             </a:r>
           </a:p>
         </p:txBody>
@@ -18853,7 +18853,7 @@
                 </a:solidFill>
                 <a:latin typeface="Calibri"/>
               </a:rPr>
-              <a:t>Geometry safety checks on the automated route</a:t>
+              <a:t>JLR rates loaded</a:t>
             </a:r>
           </a:p>
         </p:txBody>
@@ -18941,7 +18941,7 @@
                 </a:solidFill>
                 <a:latin typeface="Calibri"/>
               </a:rPr>
-              <a:t>Blocks trust</a:t>
+              <a:t>Not started</a:t>
             </a:r>
           </a:p>
         </p:txBody>
@@ -19029,7 +19029,7 @@
                 </a:solidFill>
                 <a:latin typeface="Calibri"/>
               </a:rPr>
-              <a:t>The checks that compare what was read against what was measured run on the CAD route today. The automated route validates the fields only. They must be wired on before a run is left unattended.</a:t>
+              <a:t>Until JLR's rate card is loaded through the Rate Converter, a run uses the built-in rate book of 16 June 2026.</a:t>
             </a:r>
           </a:p>
         </p:txBody>
@@ -19205,7 +19205,7 @@
                 </a:solidFill>
                 <a:latin typeface="Calibri"/>
               </a:rPr>
-              <a:t>The run itself</a:t>
+              <a:t>A trial on a real basket, and maybe a screen</a:t>
             </a:r>
           </a:p>
         </p:txBody>
@@ -19293,7 +19293,7 @@
                 </a:solidFill>
                 <a:latin typeface="Calibri"/>
               </a:rPr>
-              <a:t>The new work</a:t>
+              <a:t>Not started</a:t>
             </a:r>
           </a:p>
         </p:txBody>
@@ -19381,7 +19381,7 @@
                 </a:solidFill>
                 <a:latin typeface="Calibri"/>
               </a:rPr>
-              <a:t>A list in, a job queue, a report out, and a way to answer one question once and apply it to every part it affects.</a:t>
+              <a:t>The run is a command-line tool today. A screen is optional. A trial on real JLR parts is not.</a:t>
             </a:r>
           </a:p>
         </p:txBody>
@@ -19469,7 +19469,7 @@
                 </a:solidFill>
                 <a:latin typeface="Calibri"/>
               </a:rPr>
-              <a:t>New build</a:t>
+              <a:t>Next</a:t>
             </a:r>
           </a:p>
         </p:txBody>
@@ -19601,7 +19601,7 @@
                 </a:solidFill>
                 <a:latin typeface="Calibri"/>
               </a:rPr>
-              <a:t>The good news underneath all of that</a:t>
+              <a:t>The costing engine is the same one</a:t>
             </a:r>
           </a:p>
         </p:txBody>
@@ -19643,7 +19643,7 @@
                 </a:solidFill>
                 <a:latin typeface="Calibri"/>
               </a:rPr>
-              <a:t>The costing engine itself needs no change. We ran it on its own, outside the application, and it produced the full eight-bucket answer with nothing adjusted.</a:t>
+              <a:t>The bulk run calls the same costing engine as the screens, with the same rate book and the same geometry checks.</a:t>
             </a:r>
           </a:p>
         </p:txBody>
@@ -19844,7 +19844,7 @@
                 </a:solidFill>
                 <a:latin typeface="Calibri"/>
               </a:rPr>
-              <a:t>AI  COST  INTELLIGENCE</a:t>
+              <a:t>SHOULD-COST  ENGINEERING</a:t>
             </a:r>
           </a:p>
         </p:txBody>
@@ -20485,7 +20485,7 @@
                 </a:solidFill>
                 <a:latin typeface="Calibri"/>
               </a:rPr>
-              <a:t>All of them</a:t>
+              <a:t>Every part in the list</a:t>
             </a:r>
           </a:p>
         </p:txBody>
@@ -21013,7 +21013,7 @@
                 </a:solidFill>
                 <a:latin typeface="Calibri"/>
               </a:rPr>
-              <a:t>Minutes of machine time, plus the data gathering</a:t>
+              <a:t>Machine time, plus the data gathering</a:t>
             </a:r>
           </a:p>
         </p:txBody>
@@ -22486,7 +22486,7 @@
                 </a:solidFill>
                 <a:latin typeface="Calibri"/>
               </a:rPr>
-              <a:t>AI  COST  INTELLIGENCE</a:t>
+              <a:t>SHOULD-COST  ENGINEERING</a:t>
             </a:r>
           </a:p>
         </p:txBody>
@@ -22843,7 +22843,7 @@
                 </a:solidFill>
                 <a:latin typeface="Calibri"/>
               </a:rPr>
-              <a:t>Materials, machine rates, labour, energy, country factors. This sets the pace and it is ours to do.</a:t>
+              <a:t>Materials, machine rates, labour, energy, country factors, through the JLR Rate Converter. Ours to do.</a:t>
             </a:r>
           </a:p>
         </p:txBody>
@@ -23030,7 +23030,7 @@
                 </a:solidFill>
                 <a:latin typeface="Calibri"/>
               </a:rPr>
-              <a:t>Keep a history of rate changes</a:t>
+              <a:t>Agree who controls the rate book</a:t>
             </a:r>
           </a:p>
         </p:txBody>
@@ -23072,7 +23072,7 @@
                 </a:solidFill>
                 <a:latin typeface="Calibri"/>
               </a:rPr>
-              <a:t>Every change stamped and kept, so a costing can name the rate book it used. Prerequisite for anything audited.</a:t>
+              <a:t>Every rate book is already kept. JLR decides who may change rates and who signs them off.</a:t>
             </a:r>
           </a:p>
         </p:txBody>
@@ -23259,7 +23259,7 @@
                 </a:solidFill>
                 <a:latin typeface="Calibri"/>
               </a:rPr>
-              <a:t>Record every costing automatically</a:t>
+              <a:t>Agree what a run record must hold</a:t>
             </a:r>
           </a:p>
         </p:txBody>
@@ -23301,7 +23301,7 @@
                 </a:solidFill>
                 <a:latin typeface="Calibri"/>
               </a:rPr>
-              <a:t>Inputs, rates, answers and result stored per part. Saving one by hand is not a record a bulk run can rest on.</a:t>
+              <a:t>Each run already writes a record. JLR audit says whether it is enough, and where it is stored.</a:t>
             </a:r>
           </a:p>
         </p:txBody>
@@ -23488,7 +23488,7 @@
                 </a:solidFill>
                 <a:latin typeface="Calibri"/>
               </a:rPr>
-              <a:t>Close the automated-route gaps</a:t>
+              <a:t>Check the bulk route on our parts</a:t>
             </a:r>
           </a:p>
         </p:txBody>
@@ -23530,7 +23530,7 @@
                 </a:solidFill>
                 <a:latin typeface="Calibri"/>
               </a:rPr>
-              <a:t>Pass region and annual volume through, register gear, and wire the geometry checks on. A basket is wrong without them.</a:t>
+              <a:t>Region, volume, gear and the geometry checks are wired on. Confirm them on a handful of JLR parts.</a:t>
             </a:r>
           </a:p>
         </p:txBody>
@@ -23717,7 +23717,7 @@
                 </a:solidFill>
                 <a:latin typeface="Calibri"/>
               </a:rPr>
-              <a:t>Build the run</a:t>
+              <a:t>Decide on a screen</a:t>
             </a:r>
           </a:p>
         </p:txBody>
@@ -23759,7 +23759,7 @@
                 </a:solidFill>
                 <a:latin typeface="Calibri"/>
               </a:rPr>
-              <a:t>A list in, a job queue, one question answered once, a report out per part and per basket.</a:t>
+              <a:t>The run is a command-line tool today. Add a screen only if the team needs one.</a:t>
             </a:r>
           </a:p>
         </p:txBody>
@@ -24120,7 +24120,7 @@
                 </a:solidFill>
                 <a:latin typeface="Calibri"/>
               </a:rPr>
-              <a:t>Steps 2 and 3 are the real prerequisites</a:t>
+              <a:t>Steps 2 and 3 are about control, not code</a:t>
             </a:r>
           </a:p>
         </p:txBody>
@@ -24162,7 +24162,7 @@
                 </a:solidFill>
                 <a:latin typeface="Calibri"/>
               </a:rPr>
-              <a:t>They are not part of the run, and they are what makes a run mean anything afterwards.</a:t>
+              <a:t>The tools exist. JLR decides who owns the rates and the records.</a:t>
             </a:r>
           </a:p>
         </p:txBody>
@@ -24336,7 +24336,7 @@
                 </a:solidFill>
                 <a:latin typeface="Calibri"/>
               </a:rPr>
-              <a:t>Gathering our own rate data helps both options and does not wait on any decision about Option 2.</a:t>
+              <a:t>Our own rate data helps both options, whatever is decided.</a:t>
             </a:r>
           </a:p>
         </p:txBody>
@@ -24537,7 +24537,7 @@
                 </a:solidFill>
                 <a:latin typeface="Calibri"/>
               </a:rPr>
-              <a:t>AI  COST  INTELLIGENCE</a:t>
+              <a:t>SHOULD-COST  ENGINEERING</a:t>
             </a:r>
           </a:p>
         </p:txBody>
@@ -25882,7 +25882,7 @@
                 </a:solidFill>
                 <a:latin typeface="Calibri"/>
               </a:rPr>
-              <a:t>Moderate</a:t>
+              <a:t>Moderate: the CAPEE link</a:t>
             </a:r>
           </a:p>
         </p:txBody>
@@ -25964,13 +25964,13 @@
               </a:spcAft>
             </a:pPr>
             <a:r>
-              <a:rPr sz="1040" b="0" i="0">
-                <a:solidFill>
-                  <a:srgbClr val="99651A"/>
-                </a:solidFill>
-                <a:latin typeface="Calibri"/>
-              </a:rPr>
-              <a:t>More: the run, plus two prerequisites</a:t>
+              <a:rPr sz="1040" b="1" i="0">
+                <a:solidFill>
+                  <a:srgbClr val="2A7F50"/>
+                </a:solidFill>
+                <a:latin typeface="Calibri"/>
+              </a:rPr>
+              <a:t>Less: the run is built</a:t>
             </a:r>
           </a:p>
         </p:txBody>
@@ -27286,11 +27286,11 @@
             <a:r>
               <a:rPr sz="1040" b="1" i="0">
                 <a:solidFill>
-                  <a:srgbClr val="B03A2E"/>
-                </a:solidFill>
-                <a:latin typeface="Calibri"/>
-              </a:rPr>
-              <a:t>No, until rate history and a costing record exist</a:t>
+                  <a:srgbClr val="99651A"/>
+                </a:solidFill>
+                <a:latin typeface="Calibri"/>
+              </a:rPr>
+              <a:t>Records exist; JLR has not reviewed them</a:t>
             </a:r>
           </a:p>
         </p:txBody>
@@ -27464,7 +27464,7 @@
                 </a:solidFill>
                 <a:latin typeface="Calibri"/>
               </a:rPr>
-              <a:t>Option 1 produces the accuracy figure that Option 2 leans on, and Option 1 is audit-ready today because CAPEE keeps the record. Option 2 is not, until the rate history and the costing record exist. That is the whole argument for this order.</a:t>
+              <a:t>Option 1 gives the accuracy figure Option 2 leans on, and CAPEE keeps its record. Option 2 keeps records too, but JLR has not reviewed them. Hence this order.</a:t>
             </a:r>
           </a:p>
         </p:txBody>
@@ -27707,7 +27707,7 @@
                 </a:solidFill>
                 <a:latin typeface="Calibri"/>
               </a:rPr>
-              <a:t>AI  COST  INTELLIGENCE</a:t>
+              <a:t>SHOULD-COST  ENGINEERING</a:t>
             </a:r>
           </a:p>
         </p:txBody>
@@ -28619,7 +28619,7 @@
                 </a:solidFill>
                 <a:latin typeface="Calibri"/>
               </a:rPr>
-              <a:t>Old costings cannot be reproduced</a:t>
+              <a:t>We do not know how CAPEE is built</a:t>
             </a:r>
           </a:p>
         </p:txBody>
@@ -28707,7 +28707,7 @@
                 </a:solidFill>
                 <a:latin typeface="Calibri"/>
               </a:rPr>
-              <a:t>Option 2</a:t>
+              <a:t>Option 1</a:t>
             </a:r>
           </a:p>
         </p:txBody>
@@ -28795,7 +28795,7 @@
                 </a:solidFill>
                 <a:latin typeface="Calibri"/>
               </a:rPr>
-              <a:t>No rate history, and no automatic record of a costing. Both have to be built before bulk is used for anything audited.</a:t>
+              <a:t>Holds up the choice of connection route. One answer from IT sorts it.</a:t>
             </a:r>
           </a:p>
         </p:txBody>
@@ -28879,7 +28879,7 @@
             <a:r>
               <a:rPr sz="960" b="1" i="0">
                 <a:solidFill>
-                  <a:srgbClr val="B03A2E"/>
+                  <a:srgbClr val="99651A"/>
                 </a:solidFill>
                 <a:latin typeface="Calibri"/>
               </a:rPr>
@@ -28971,7 +28971,7 @@
                 </a:solidFill>
                 <a:latin typeface="Calibri"/>
               </a:rPr>
-              <a:t>We do not know how CAPEE is built</a:t>
+              <a:t>Run records not yet reviewed by JLR</a:t>
             </a:r>
           </a:p>
         </p:txBody>
@@ -29059,7 +29059,7 @@
                 </a:solidFill>
                 <a:latin typeface="Calibri"/>
               </a:rPr>
-              <a:t>Option 1</a:t>
+              <a:t>Option 2</a:t>
             </a:r>
           </a:p>
         </p:txBody>
@@ -29147,7 +29147,7 @@
                 </a:solidFill>
                 <a:latin typeface="Calibri"/>
               </a:rPr>
-              <a:t>Holds up the choice of connection route. One answer from IT sorts it.</a:t>
+              <a:t>Rate books and run records are kept now. JLR audit has not said whether they are enough.</a:t>
             </a:r>
           </a:p>
         </p:txBody>
@@ -29235,7 +29235,7 @@
                 </a:solidFill>
                 <a:latin typeface="Calibri"/>
               </a:rPr>
-              <a:t>High</a:t>
+              <a:t>Medium</a:t>
             </a:r>
           </a:p>
         </p:txBody>
@@ -29323,7 +29323,7 @@
                 </a:solidFill>
                 <a:latin typeface="Calibri"/>
               </a:rPr>
-              <a:t>The automated route has gaps</a:t>
+              <a:t>The built-in rates are not JLR rates</a:t>
             </a:r>
           </a:p>
         </p:txBody>
@@ -29411,7 +29411,7 @@
                 </a:solidFill>
                 <a:latin typeface="Calibri"/>
               </a:rPr>
-              <a:t>Option 2</a:t>
+              <a:t>Both</a:t>
             </a:r>
           </a:p>
         </p:txBody>
@@ -29499,7 +29499,7 @@
                 </a:solidFill>
                 <a:latin typeface="Calibri"/>
               </a:rPr>
-              <a:t>No region, no annual volume, no gear. Small work, but a basket is quietly wrong without it.</a:t>
+              <a:t>The rate library is dated 16 June 2026. Until our card is loaded, costs use those rates.</a:t>
             </a:r>
           </a:p>
         </p:txBody>
@@ -30027,7 +30027,7 @@
                 </a:solidFill>
                 <a:latin typeface="Calibri"/>
               </a:rPr>
-              <a:t>The drawing and rendered views go to an AI service</a:t>
+              <a:t>The AI mode could be switched on</a:t>
             </a:r>
           </a:p>
         </p:txBody>
@@ -30203,7 +30203,7 @@
                 </a:solidFill>
                 <a:latin typeface="Calibri"/>
               </a:rPr>
-              <a:t>The whole drawing PDF goes, plus up to four pictures of the shape rendered from the model. The CAD file itself never leaves the server, and it can run through a JLR service.</a:t>
+              <a:t>AI is off in the JLR build and neither option needs it. Turning it on is a setting, so it needs an owner and approval first.</a:t>
             </a:r>
           </a:p>
         </p:txBody>
@@ -30291,7 +30291,7 @@
                 </a:solidFill>
                 <a:latin typeface="Calibri"/>
               </a:rPr>
-              <a:t>Medium</a:t>
+              <a:t>Low</a:t>
             </a:r>
           </a:p>
         </p:txBody>
@@ -30379,7 +30379,7 @@
                 </a:solidFill>
                 <a:latin typeface="Calibri"/>
               </a:rPr>
-              <a:t>Server type</a:t>
+              <a:t>Where the measuring engine runs</a:t>
             </a:r>
           </a:p>
         </p:txBody>
@@ -30555,7 +30555,7 @@
                 </a:solidFill>
                 <a:latin typeface="Calibri"/>
               </a:rPr>
-              <a:t>The measuring engine needs a normal Linux server. Easy to confirm now, awkward if we miss it.</a:t>
+              <a:t>Needs a standard Linux server or the Windows package. The cut-down Linux kind cannot run it.</a:t>
             </a:r>
           </a:p>
         </p:txBody>
@@ -30907,7 +30907,7 @@
                 </a:solidFill>
                 <a:latin typeface="Calibri"/>
               </a:rPr>
-              <a:t>Six rounds of work in the last few weeks. For any trial we pin a version and stay on it.</a:t>
+              <a:t>It is under active development. For any trial we pin a version and stay on it.</a:t>
             </a:r>
           </a:p>
         </p:txBody>
@@ -31370,7 +31370,7 @@
                 </a:solidFill>
                 <a:latin typeface="Calibri"/>
               </a:rPr>
-              <a:t>AI  COST  INTELLIGENCE</a:t>
+              <a:t>SHOULD-COST  ENGINEERING</a:t>
             </a:r>
           </a:p>
         </p:txBody>
@@ -31672,7 +31672,7 @@
                 </a:solidFill>
                 <a:latin typeface="Calibri"/>
               </a:rPr>
-              <a:t>Let CostVision fill CAPEE's cost input automatically for one part type, on 30 to 50 parts we have already bought. At the end we will know how often the measurement is right, how often an engineer has to correct it, and what it saves. Option 2 follows once that is known.</a:t>
+              <a:t>Let CostVision fill CAPEE's cost input for one part type, on 30 to 50 parts we have already bought. At the end we will know how close it gets, how often an engineer has to correct it, and how much time it saves. Option 2 follows once that is known.</a:t>
             </a:r>
           </a:p>
         </p:txBody>
@@ -32011,7 +32011,7 @@
                 </a:solidFill>
                 <a:latin typeface="Calibri"/>
               </a:rPr>
-              <a:t>Fill CAPEE's cost input from the 3D model and the drawing, for one part type</a:t>
+              <a:t>Fill CAPEE's cost input from the 3D model, for one part type</a:t>
             </a:r>
           </a:p>
         </p:txBody>
@@ -32539,7 +32539,7 @@
                 </a:solidFill>
                 <a:latin typeface="Calibri"/>
               </a:rPr>
-              <a:t>A measured accuracy figure against real JLR prices, and a measured time saving per part</a:t>
+              <a:t>A measured accuracy figure against real JLR prices, and a measured time per part</a:t>
             </a:r>
           </a:p>
         </p:txBody>
@@ -32715,7 +32715,7 @@
                 </a:solidFill>
                 <a:latin typeface="Calibri"/>
               </a:rPr>
-              <a:t>A decision on Option 2 today. It needs the accuracy answer first, and some work that has not been done</a:t>
+              <a:t>A decision on Option 2 today. It needs the accuracy answer first</a:t>
             </a:r>
           </a:p>
         </p:txBody>
@@ -32889,7 +32889,7 @@
                 </a:solidFill>
                 <a:latin typeface="Calibri"/>
               </a:rPr>
-              <a:t>CostVision has never been checked against a price JLR has actually paid. Not one part. That is exactly what the proof of concept is for, and until it is done I cannot tell you how accurate the tool is.</a:t>
+              <a:t>CostVision has never been checked against a price JLR has actually paid. Its arithmetic matches a hand calculation, but that is not the same thing. The proof of concept is what tells us how close it gets.</a:t>
             </a:r>
           </a:p>
         </p:txBody>
@@ -33090,7 +33090,7 @@
                 </a:solidFill>
                 <a:latin typeface="Calibri"/>
               </a:rPr>
-              <a:t>AI  COST  INTELLIGENCE</a:t>
+              <a:t>SHOULD-COST  ENGINEERING</a:t>
             </a:r>
           </a:p>
         </p:txBody>
@@ -33812,7 +33812,7 @@
                 </a:solidFill>
                 <a:latin typeface="Calibri"/>
               </a:rPr>
-              <a:t>Material prices, machine rates per hour, labour by grade, electricity and gas. Worth starting now whatever is decided, because both options need it and it is ours to gather.</a:t>
+              <a:t>Material prices, machine rates per hour, labour by grade, electricity and gas. The Rate Converter loads JLR's rate card as exported, with no macros. Worth starting now.</a:t>
             </a:r>
           </a:p>
         </p:txBody>
@@ -34364,7 +34364,7 @@
                 </a:solidFill>
                 <a:latin typeface="Calibri"/>
               </a:rPr>
-              <a:t>A decision on the drawing-reading step</a:t>
+              <a:t>Agreement that AI stays off</a:t>
             </a:r>
           </a:p>
         </p:txBody>
@@ -34406,7 +34406,7 @@
                 </a:solidFill>
                 <a:latin typeface="Calibri"/>
               </a:rPr>
-              <a:t>Either switch off the AI reading and keep the measuring, or run it through a JLR-approved service. The data-flow document is written and covers both.</a:t>
+              <a:t>Neither option needs AI, and the JLR build has it switched off. If we want the AI features later, that is a separate approval.</a:t>
             </a:r>
           </a:p>
         </p:txBody>
@@ -35078,7 +35078,7 @@
                 </a:solidFill>
                 <a:latin typeface="Calibri"/>
               </a:rPr>
-              <a:t>AI  COST  INTELLIGENCE</a:t>
+              <a:t>SHOULD-COST  ENGINEERING</a:t>
             </a:r>
           </a:p>
         </p:txBody>
@@ -35248,7 +35248,7 @@
                 </a:solidFill>
                 <a:latin typeface="Calibri"/>
               </a:rPr>
-              <a:t>Every count and timing in this pack was read off the software or measured this month, and checked again when these slides were built.</a:t>
+              <a:t>Every count in this pack was checked against the software on 28 September 2026.</a:t>
             </a:r>
           </a:p>
         </p:txBody>
@@ -35508,7 +35508,7 @@
                 </a:solidFill>
                 <a:latin typeface="Calibri"/>
               </a:rPr>
-              <a:t>19 part types cost through the engine</a:t>
+              <a:t>19 manufacturing processes; 13 costed from CAD</a:t>
             </a:r>
           </a:p>
         </p:txBody>
@@ -35596,7 +35596,7 @@
                 </a:solidFill>
                 <a:latin typeface="Calibri"/>
               </a:rPr>
-              <a:t>Traced each one from its screen through to the costing</a:t>
+              <a:t>Commodity modules and CAD rule packs in the code</a:t>
             </a:r>
           </a:p>
         </p:txBody>
@@ -35684,7 +35684,7 @@
                 </a:solidFill>
                 <a:latin typeface="Calibri"/>
               </a:rPr>
-              <a:t>165 costing rules, 149 write into a named box</a:t>
+              <a:t>About 12 to 70 values typed per part</a:t>
             </a:r>
           </a:p>
         </p:txBody>
@@ -35772,7 +35772,7 @@
                 </a:solidFill>
                 <a:latin typeface="Calibri"/>
               </a:rPr>
-              <a:t>Counted in the rule packs for the twelve part types that have them; 9 to 18 apply per part</a:t>
+              <a:t>Rough count of the input fields on CostVision's own forms, by commodity</a:t>
             </a:r>
           </a:p>
         </p:txBody>
@@ -35860,7 +35860,7 @@
                 </a:solidFill>
                 <a:latin typeface="Calibri"/>
               </a:rPr>
-              <a:t>12 to 69 boxes typed by hand today</a:t>
+              <a:t>Engine matches a hand calculation to under 0.01%</a:t>
             </a:r>
           </a:p>
         </p:txBody>
@@ -35948,7 +35948,7 @@
                 </a:solidFill>
                 <a:latin typeface="Calibri"/>
               </a:rPr>
-              <a:t>Counted the input fields on the machining, casting, moulding and pressing forms</a:t>
+              <a:t>Reference machined bracket, £23.27, pinned in an automated test</a:t>
             </a:r>
           </a:p>
         </p:txBody>
@@ -36036,7 +36036,7 @@
                 </a:solidFill>
                 <a:latin typeface="Calibri"/>
               </a:rPr>
-              <a:t>The costing gives the same answer every run</a:t>
+              <a:t>6 real production parts pinned</a:t>
             </a:r>
           </a:p>
         </p:txBody>
@@ -36124,7 +36124,7 @@
                 </a:solidFill>
                 <a:latin typeface="Calibri"/>
               </a:rPr>
-              <a:t>Ran one part five times, identical to the last decimal</a:t>
+              <a:t>A change that moves any of them fails the build</a:t>
             </a:r>
           </a:p>
         </p:txBody>
@@ -36212,7 +36212,7 @@
                 </a:solidFill>
                 <a:latin typeface="Calibri"/>
               </a:rPr>
-              <a:t>Measuring makes no internet connection</a:t>
+              <a:t>2,438 automated tests</a:t>
             </a:r>
           </a:p>
         </p:txBody>
@@ -36300,7 +36300,7 @@
                 </a:solidFill>
                 <a:latin typeface="Calibri"/>
               </a:rPr>
-              <a:t>Checked every line for outbound calls; there are none</a:t>
+              <a:t>Plus browser tests that cost every commodity and export Excel and PDF</a:t>
             </a:r>
           </a:p>
         </p:txBody>
@@ -36388,7 +36388,7 @@
                 </a:solidFill>
                 <a:latin typeface="Calibri"/>
               </a:rPr>
-              <a:t>CAD files stay on the server</a:t>
+              <a:t>Measuring makes no internet connection</a:t>
             </a:r>
           </a:p>
         </p:txBody>
@@ -36476,7 +36476,7 @@
                 </a:solidFill>
                 <a:latin typeface="Calibri"/>
               </a:rPr>
-              <a:t>Measured locally. The drawing PDF and rendered views go out; the CAD file never does</a:t>
+              <a:t>Windows package runs offline and listens on this laptop only (127.0.0.1)</a:t>
             </a:r>
           </a:p>
         </p:txBody>
@@ -36564,7 +36564,7 @@
                 </a:solidFill>
                 <a:latin typeface="Calibri"/>
               </a:rPr>
-              <a:t>0.9 to 3.1 seconds to measure a part</a:t>
+              <a:t>AI is switched off in the JLR build</a:t>
             </a:r>
           </a:p>
         </p:txBody>
@@ -36652,7 +36652,7 @@
                 </a:solidFill>
                 <a:latin typeface="Calibri"/>
               </a:rPr>
-              <a:t>Five real production parts, 0.6 MB to 3.0 MB, this month</a:t>
+              <a:t>The package sets the no-AI switch; AI screens are hidden</a:t>
             </a:r>
           </a:p>
         </p:txBody>
@@ -36740,7 +36740,7 @@
                 </a:solidFill>
                 <a:latin typeface="Calibri"/>
               </a:rPr>
-              <a:t>40 parts in 31 seconds on two workers</a:t>
+              <a:t>A bulk run exists, with no AI</a:t>
             </a:r>
           </a:p>
         </p:txBody>
@@ -36828,7 +36828,7 @@
                 </a:solidFill>
                 <a:latin typeface="Calibri"/>
               </a:rPr>
-              <a:t>Measured wall-clock, nothing reused from cache; larger rows carry that rate forward</a:t>
+              <a:t>Command-line run: results, open questions and a run record</a:t>
             </a:r>
           </a:p>
         </p:txBody>
@@ -36916,7 +36916,7 @@
                 </a:solidFill>
                 <a:latin typeface="Calibri"/>
               </a:rPr>
-              <a:t>Six of eight sample parts costed straight through</a:t>
+              <a:t>Every rate book is kept</a:t>
             </a:r>
           </a:p>
         </p:txBody>
@@ -37004,7 +37004,7 @@
                 </a:solidFill>
                 <a:latin typeface="Calibri"/>
               </a:rPr>
-              <a:t>With the material family given. Given nothing, all eight ask for it first</a:t>
+              <a:t>Stored by a content fingerprint, so a past costing can be redone</a:t>
             </a:r>
           </a:p>
         </p:txBody>
@@ -37180,7 +37180,7 @@
                 </a:solidFill>
                 <a:latin typeface="Calibri"/>
               </a:rPr>
-              <a:t>Counted directly in the source files</a:t>
+              <a:t>Counted in the source files on 28 September 2026, rounded</a:t>
             </a:r>
           </a:p>
         </p:txBody>
@@ -37444,7 +37444,7 @@
                 </a:solidFill>
                 <a:latin typeface="Calibri"/>
               </a:rPr>
-              <a:t>328 materials, 178 machines, 42 labour rates, 20 regions</a:t>
+              <a:t>328 materials, 178 machines, 42 labour grades</a:t>
             </a:r>
           </a:p>
         </p:txBody>
@@ -37532,7 +37532,7 @@
                 </a:solidFill>
                 <a:latin typeface="Calibri"/>
               </a:rPr>
-              <a:t>Counted in the rate library; rates effective June and July 2026</a:t>
+              <a:t>Rate library 2.1.0, dated 16 June 2026</a:t>
             </a:r>
           </a:p>
         </p:txBody>
@@ -37620,7 +37620,7 @@
                 </a:solidFill>
                 <a:latin typeface="Calibri"/>
               </a:rPr>
-              <a:t>2,079 automatic tests across 156 files</a:t>
+              <a:t>20 manufacturing regions</a:t>
             </a:r>
           </a:p>
         </p:txBody>
@@ -37708,7 +37708,7 @@
                 </a:solidFill>
                 <a:latin typeface="Calibri"/>
               </a:rPr>
-              <a:t>Full test run at build time, all passing</a:t>
+              <a:t>Europe, UK, Turkey, the Americas and Asia, in the rate model</a:t>
             </a:r>
           </a:p>
         </p:txBody>
@@ -37796,7 +37796,7 @@
                 </a:solidFill>
                 <a:latin typeface="Calibri"/>
               </a:rPr>
-              <a:t>The engine runs on its own, outside the application</a:t>
+              <a:t>Sign-in and per-user data</a:t>
             </a:r>
           </a:p>
         </p:txBody>
@@ -37884,7 +37884,7 @@
                 </a:solidFill>
                 <a:latin typeface="Calibri"/>
               </a:rPr>
-              <a:t>Called it standalone; produced the full eight-bucket answer unchanged</a:t>
+              <a:t>Users see only their own saved work; a reset ends every old session</a:t>
             </a:r>
           </a:p>
         </p:txBody>
@@ -38058,7 +38058,7 @@
                 </a:solidFill>
                 <a:latin typeface="Calibri"/>
               </a:rPr>
-              <a:t>The tool has an accuracy report, but no real purchase prices are loaded into it yet. That is ask number one.</a:t>
+              <a:t>Accuracy against real prices. The tool learns from logged actual prices, but none from JLR are loaded yet. That is ask number one.</a:t>
             </a:r>
           </a:p>
         </p:txBody>
@@ -38259,7 +38259,7 @@
                 </a:solidFill>
                 <a:latin typeface="Calibri"/>
               </a:rPr>
-              <a:t>AI  COST  INTELLIGENCE</a:t>
+              <a:t>SHOULD-COST  ENGINEERING</a:t>
             </a:r>
           </a:p>
         </p:txBody>
@@ -38620,7 +38620,7 @@
                 </a:solidFill>
                 <a:latin typeface="Calibri"/>
               </a:rPr>
-              <a:t>machined part 12 · casting 30 · moulding 39 · pressing 69</a:t>
+              <a:t>about 12 to about 70 on CostVision's own forms</a:t>
             </a:r>
           </a:p>
           <a:p>
@@ -38911,7 +38911,7 @@
                 </a:solidFill>
                 <a:latin typeface="Calibri"/>
               </a:rPr>
-              <a:t>The engineer hands over the 3D model and the drawing.</a:t>
+              <a:t>The engineer hands over the 3D model: STEP, IGES or STL.</a:t>
             </a:r>
           </a:p>
           <a:p>
@@ -38949,7 +38949,7 @@
                 </a:solidFill>
                 <a:latin typeface="Calibri"/>
               </a:rPr>
-              <a:t>volume, size, surface area, wall thickness, holes,</a:t>
+              <a:t>volume, weight, size, surface area, walls, holes,</a:t>
             </a:r>
           </a:p>
           <a:p>
@@ -38968,7 +38968,7 @@
                 </a:solidFill>
                 <a:latin typeface="Calibri"/>
               </a:rPr>
-              <a:t>pockets, bosses, gear teeth, bend count.</a:t>
+              <a:t>pockets, bosses, gear teeth, bends.</a:t>
             </a:r>
           </a:p>
           <a:p>
@@ -38997,7 +38997,7 @@
                 </a:solidFill>
                 <a:latin typeface="Calibri"/>
               </a:rPr>
-              <a:t>Read off the drawing:</a:t>
+              <a:t>Asked of the engineer:</a:t>
             </a:r>
           </a:p>
           <a:p>
@@ -39016,7 +39016,7 @@
                 </a:solidFill>
                 <a:latin typeface="Calibri"/>
               </a:rPr>
-              <a:t>tolerances, surface finish, heat treatment, coating,</a:t>
+              <a:t>material family, tolerances, finish, heat treatment,</a:t>
             </a:r>
           </a:p>
           <a:p>
@@ -39035,7 +39035,7 @@
                 </a:solidFill>
                 <a:latin typeface="Calibri"/>
               </a:rPr>
-              <a:t>masked features.</a:t>
+              <a:t>and anything else the shape cannot decide.</a:t>
             </a:r>
           </a:p>
           <a:p>
@@ -39064,7 +39064,7 @@
                 </a:solidFill>
                 <a:latin typeface="Calibri"/>
               </a:rPr>
-              <a:t>165 costing rules fill the form. 149 write straight</a:t>
+              <a:t>Fixed rules fill the form. Same part, same numbers,</a:t>
             </a:r>
           </a:p>
           <a:p>
@@ -39083,7 +39083,7 @@
                 </a:solidFill>
                 <a:latin typeface="Calibri"/>
               </a:rPr>
-              <a:t>into a named box. Same part, same numbers, always.</a:t>
+              <a:t>every time.</a:t>
             </a:r>
           </a:p>
         </p:txBody>
@@ -39215,7 +39215,7 @@
                 </a:solidFill>
                 <a:latin typeface="Calibri"/>
               </a:rPr>
-              <a:t>Measuring and reading are two different jobs</a:t>
+              <a:t>Measuring is not AI</a:t>
             </a:r>
           </a:p>
         </p:txBody>
@@ -39257,7 +39257,7 @@
                 </a:solidFill>
                 <a:latin typeface="Calibri"/>
               </a:rPr>
-              <a:t>The 3D model is measured by software, in the way a CMM measures a part. That is not AI. The AI reads the drawing and looks at pictures of the shape rendered from the model, and everything it hands back is checked against the measurements before it can move a cost. Slide 8 covers those checks. On the deterministic setting the AI is switched off completely and the part still costs.</a:t>
+              <a:t>The 3D model is measured by software, the way a CMM measures a part. Fixed rules turn the measurements into cost inputs. AI is switched off in the JLR build. There is an optional AI mode that can read drawings, but it is off at JLR, and even when it is on it never sets a price.</a:t>
             </a:r>
           </a:p>
         </p:txBody>
@@ -39458,7 +39458,7 @@
                 </a:solidFill>
                 <a:latin typeface="Calibri"/>
               </a:rPr>
-              <a:t>AI  COST  INTELLIGENCE</a:t>
+              <a:t>SHOULD-COST  ENGINEERING</a:t>
             </a:r>
           </a:p>
         </p:txBody>
@@ -39628,7 +39628,7 @@
                 </a:solidFill>
                 <a:latin typeface="Calibri"/>
               </a:rPr>
-              <a:t>Read off the software this month. This is what the tool does today.</a:t>
+              <a:t>Checked against the software on 28 September 2026.</a:t>
             </a:r>
           </a:p>
         </p:txBody>
@@ -39804,7 +39804,7 @@
                 </a:solidFill>
                 <a:latin typeface="Calibri"/>
               </a:rPr>
-              <a:t>19 part types cost through the engine, plus an assembly</a:t>
+              <a:t>19 manufacturing processes, an assembly roll-up and a</a:t>
             </a:r>
           </a:p>
           <a:p>
@@ -39823,7 +39823,7 @@
                 </a:solidFill>
                 <a:latin typeface="Calibri"/>
               </a:rPr>
-              <a:t>roll-up and a separate software model</a:t>
+              <a:t>49-module software cost model</a:t>
             </a:r>
           </a:p>
           <a:p>
@@ -39842,7 +39842,7 @@
                 </a:solidFill>
                 <a:latin typeface="Calibri"/>
               </a:rPr>
-              <a:t>The costing gives the same answer every run</a:t>
+              <a:t>13 of those costed straight from a CAD file</a:t>
             </a:r>
           </a:p>
           <a:p>
@@ -39861,7 +39861,7 @@
                 </a:solidFill>
                 <a:latin typeface="Calibri"/>
               </a:rPr>
-              <a:t>Measures 3D models with no internet connection</a:t>
+              <a:t>Same inputs, same answer, every time</a:t>
             </a:r>
           </a:p>
           <a:p>
@@ -39880,7 +39880,7 @@
                 </a:solidFill>
                 <a:latin typeface="Calibri"/>
               </a:rPr>
-              <a:t>Reads drawings for tolerances, finish, heat treatment</a:t>
+              <a:t>Measures STEP, IGES and STL with no internet</a:t>
             </a:r>
           </a:p>
           <a:p>
@@ -39899,7 +39899,7 @@
                 </a:solidFill>
                 <a:latin typeface="Calibri"/>
               </a:rPr>
-              <a:t>(needs the AI service; the default setting runs without</a:t>
+              <a:t>Asks the engineer where the geometry cannot decide</a:t>
             </a:r>
           </a:p>
           <a:p>
@@ -39918,7 +39918,7 @@
                 </a:solidFill>
                 <a:latin typeface="Calibri"/>
               </a:rPr>
-              <a:t>it and still costs the part)</a:t>
+              <a:t>Blocks the costing when the checks find a contradiction</a:t>
             </a:r>
           </a:p>
           <a:p>
@@ -39937,7 +39937,7 @@
                 </a:solidFill>
                 <a:latin typeface="Calibri"/>
               </a:rPr>
-              <a:t>Refuses geometry it cannot honestly measure</a:t>
+              <a:t>Bulk run from a parts list, with no AI</a:t>
             </a:r>
           </a:p>
           <a:p>
@@ -39956,7 +39956,7 @@
                 </a:solidFill>
                 <a:latin typeface="Calibri"/>
               </a:rPr>
-              <a:t>Asks before it scales an inch model</a:t>
+              <a:t>Keeps every rate book, so a costing can be redone</a:t>
             </a:r>
           </a:p>
           <a:p>
@@ -39975,7 +39975,7 @@
                 </a:solidFill>
                 <a:latin typeface="Calibri"/>
               </a:rPr>
-              <a:t>Same safety checks on every CAD route, printed in the</a:t>
+              <a:t>Rate library of 16 June 2026: 328 materials, 178</a:t>
             </a:r>
           </a:p>
           <a:p>
@@ -39994,7 +39994,7 @@
                 </a:solidFill>
                 <a:latin typeface="Calibri"/>
               </a:rPr>
-              <a:t>report</a:t>
+              <a:t>machines, 42 labour grades, 20 regions</a:t>
             </a:r>
           </a:p>
           <a:p>
@@ -40013,7 +40013,7 @@
                 </a:solidFill>
                 <a:latin typeface="Calibri"/>
               </a:rPr>
-              <a:t>328 materials, 178 machines, 42 labour rates, 20 regions</a:t>
+              <a:t>Windows package: no installer, admin rights or internet</a:t>
             </a:r>
           </a:p>
           <a:p>
@@ -40032,7 +40032,7 @@
                 </a:solidFill>
                 <a:latin typeface="Calibri"/>
               </a:rPr>
-              <a:t>2,079 automatic tests across 156 files, all passing</a:t>
+              <a:t>2,438 automated tests; 6 real parts pinned</a:t>
             </a:r>
           </a:p>
         </p:txBody>
@@ -40227,7 +40227,7 @@
                 </a:solidFill>
                 <a:latin typeface="Calibri"/>
               </a:rPr>
-              <a:t>No history kept when someone changes a rate</a:t>
+              <a:t>No link into CAPEE yet</a:t>
             </a:r>
           </a:p>
           <a:p>
@@ -40246,7 +40246,7 @@
                 </a:solidFill>
                 <a:latin typeface="Calibri"/>
               </a:rPr>
-              <a:t>No automatic record of a costing, so an old one cannot</a:t>
+              <a:t>No JLR single sign-on; it has its own sign-in</a:t>
             </a:r>
           </a:p>
           <a:p>
@@ -40265,7 +40265,7 @@
                 </a:solidFill>
                 <a:latin typeface="Calibri"/>
               </a:rPr>
-              <a:t>be reproduced</a:t>
+              <a:t>The bulk run is a command-line tool, not a screen</a:t>
             </a:r>
           </a:p>
           <a:p>
@@ -40284,7 +40284,7 @@
                 </a:solidFill>
                 <a:latin typeface="Calibri"/>
               </a:rPr>
-              <a:t>No JLR sign-on; it has its own logins today</a:t>
+              <a:t>A costing done on screen is kept only if it is saved</a:t>
             </a:r>
           </a:p>
           <a:p>
@@ -40303,7 +40303,7 @@
                 </a:solidFill>
                 <a:latin typeface="Calibri"/>
               </a:rPr>
-              <a:t>Gear costs in the screens but the automated route</a:t>
+              <a:t>Extrusion has no CAD rules yet (its form still costs it)</a:t>
             </a:r>
           </a:p>
           <a:p>
@@ -40322,7 +40322,7 @@
                 </a:solidFill>
                 <a:latin typeface="Calibri"/>
               </a:rPr>
-              <a:t>cannot reach it</a:t>
+              <a:t>An STL has no feature table, so a machined STL needs</a:t>
             </a:r>
           </a:p>
           <a:p>
@@ -40341,7 +40341,7 @@
                 </a:solidFill>
                 <a:latin typeface="Calibri"/>
               </a:rPr>
-              <a:t>The automated route cannot yet be told a region or an</a:t>
+              <a:t>its cycle time typed in</a:t>
             </a:r>
           </a:p>
           <a:p>
@@ -40360,7 +40360,7 @@
                 </a:solidFill>
                 <a:latin typeface="Calibri"/>
               </a:rPr>
-              <a:t>annual volume</a:t>
+              <a:t>The built-in rates are not JLR rates until we load ours</a:t>
             </a:r>
           </a:p>
           <a:p>
@@ -40379,26 +40379,7 @@
                 </a:solidFill>
                 <a:latin typeface="Calibri"/>
               </a:rPr>
-              <a:t>The geometry safety checks run on the CAD route, not</a:t>
-            </a:r>
-          </a:p>
-          <a:p>
-            <a:pPr algn="l">
-              <a:lnSpc>
-                <a:spcPct val="112000"/>
-              </a:lnSpc>
-              <a:spcAft>
-                <a:spcPts val="300"/>
-              </a:spcAft>
-            </a:pPr>
-            <a:r>
-              <a:rPr sz="1050" b="0" i="0">
-                <a:solidFill>
-                  <a:srgbClr val="3A4356"/>
-                </a:solidFill>
-                <a:latin typeface="Calibri"/>
-              </a:rPr>
-              <a:t>yet on the automated one</a:t>
+              <a:t>AI features are off at JLR, by design</a:t>
             </a:r>
           </a:p>
           <a:p>
@@ -40591,7 +40572,7 @@
                 </a:solidFill>
                 <a:latin typeface="Calibri"/>
               </a:rPr>
-              <a:t>Six rounds of work in the last few weeks. The tool now refuses bad geometry instead of costing it, asks about units, runs the same checks on every CAD route and prints them in the report, measures a file once instead of four times, and widens its confidence range when a number was typed rather than measured.</a:t>
+              <a:t>The bulk run now exists, with no AI. Every rate book is kept, so a past costing can be redone. The bulk run uses the same geometry checks as a single part, takes a region and a volume, and covers gear. And a Windows package now runs on a locked-down laptop.</a:t>
             </a:r>
           </a:p>
         </p:txBody>
@@ -40792,7 +40773,7 @@
                 </a:solidFill>
                 <a:latin typeface="Calibri"/>
               </a:rPr>
-              <a:t>AI  COST  INTELLIGENCE</a:t>
+              <a:t>SHOULD-COST  ENGINEERING</a:t>
             </a:r>
           </a:p>
         </p:txBody>
@@ -42179,7 +42160,7 @@
                 </a:solidFill>
                 <a:latin typeface="Calibri"/>
               </a:rPr>
-              <a:t>Instead of typing between twelve and seventy boxes,</a:t>
+              <a:t>Instead of typing a dozen to seventy boxes, the</a:t>
             </a:r>
           </a:p>
           <a:p>
@@ -42198,7 +42179,7 @@
                 </a:solidFill>
                 <a:latin typeface="Calibri"/>
               </a:rPr>
-              <a:t>the engineer hands over the 3D model and the drawing</a:t>
+              <a:t>engineer hands over the 3D model and checks what</a:t>
             </a:r>
           </a:p>
           <a:p>
@@ -42217,7 +42198,7 @@
                 </a:solidFill>
                 <a:latin typeface="Calibri"/>
               </a:rPr>
-              <a:t>and the boxes fill in.</a:t>
+              <a:t>fills in.</a:t>
             </a:r>
           </a:p>
           <a:p>
@@ -42246,7 +42227,7 @@
                 </a:solidFill>
                 <a:latin typeface="Calibri"/>
               </a:rPr>
-              <a:t>Moves five pieces of software, about 14,300 lines,</a:t>
+              <a:t>We hand over the measuring engine, the rules and</a:t>
             </a:r>
           </a:p>
           <a:p>
@@ -42265,7 +42246,7 @@
                 </a:solidFill>
                 <a:latin typeface="Calibri"/>
               </a:rPr>
-              <a:t>with the safety checks. Slide 7 lists them.</a:t>
+              <a:t>the checks. Slide 7 lists them.</a:t>
             </a:r>
           </a:p>
         </p:txBody>
@@ -42399,7 +42380,7 @@
                 </a:solidFill>
                 <a:latin typeface="Calibri"/>
               </a:rPr>
-              <a:t>OPTION 2 · cost in bulk, run by an agent</a:t>
+              <a:t>OPTION 2 · cost in bulk, unattended</a:t>
             </a:r>
           </a:p>
         </p:txBody>
@@ -42498,7 +42479,7 @@
                 </a:solidFill>
                 <a:latin typeface="Calibri"/>
               </a:rPr>
-              <a:t>genuinely cannot decide.</a:t>
+              <a:t>cannot decide.</a:t>
             </a:r>
           </a:p>
           <a:p>
@@ -42527,7 +42508,7 @@
                 </a:solidFill>
                 <a:latin typeface="Calibri"/>
               </a:rPr>
-              <a:t>Same engine and the same rates. The new work is the</a:t>
+              <a:t>The run is built. What is left is our rates, a trial,</a:t>
             </a:r>
           </a:p>
           <a:p>
@@ -42546,7 +42527,7 @@
                 </a:solidFill>
                 <a:latin typeface="Calibri"/>
               </a:rPr>
-              <a:t>run, its record, and wiring the checks onto it.</a:t>
+              <a:t>and a screen for it if we want one.</a:t>
             </a:r>
           </a:p>
         </p:txBody>
@@ -42720,7 +42701,7 @@
                 </a:solidFill>
                 <a:latin typeface="Calibri"/>
               </a:rPr>
-              <a:t>Option 1 is the cheaper thing to try and it produces the accuracy number that Option 2 needs. Costing five hundred parts is only worth doing once we know the tool gets one part right.</a:t>
+              <a:t>Option 1 is cheaper to try and gives the accuracy figure Option 2 needs. No sense costing 500 parts until one part is right.</a:t>
             </a:r>
           </a:p>
         </p:txBody>
@@ -42921,7 +42902,7 @@
                 </a:solidFill>
                 <a:latin typeface="Calibri"/>
               </a:rPr>
-              <a:t>AI  COST  INTELLIGENCE</a:t>
+              <a:t>SHOULD-COST  ENGINEERING</a:t>
             </a:r>
           </a:p>
         </p:txBody>
@@ -43293,7 +43274,7 @@
                 </a:solidFill>
                 <a:latin typeface="Calibri"/>
               </a:rPr>
-              <a:t>Hands over files</a:t>
+              <a:t>Hands over the model</a:t>
             </a:r>
           </a:p>
         </p:txBody>
@@ -43335,7 +43316,7 @@
                 </a:solidFill>
                 <a:latin typeface="Calibri"/>
               </a:rPr>
-              <a:t>3D model and drawing, from the CAPEE screen</a:t>
+              <a:t>STEP, IGES or STL, from the CAPEE screen</a:t>
             </a:r>
           </a:p>
         </p:txBody>
@@ -43735,7 +43716,7 @@
             <a:avLst/>
           </a:prstGeom>
           <a:solidFill>
-            <a:srgbClr val="6B3FA0"/>
+            <a:srgbClr val="1D6FB8"/>
           </a:solidFill>
           <a:ln>
             <a:noFill/>
@@ -43779,7 +43760,7 @@
             <a:avLst/>
           </a:prstGeom>
           <a:solidFill>
-            <a:srgbClr val="6B3FA0"/>
+            <a:srgbClr val="1D6FB8"/>
           </a:solidFill>
           <a:ln>
             <a:noFill/>
@@ -43810,7 +43791,7 @@
       </p:sp>
       <p:pic>
         <p:nvPicPr>
-          <p:cNvPr id="27" name="Picture 26" descr="clip.png"/>
+          <p:cNvPr id="27" name="Picture 26" descr="cog.png"/>
           <p:cNvPicPr>
             <a:picLocks noChangeAspect="1"/>
           </p:cNvPicPr>
@@ -43869,7 +43850,7 @@
                 </a:solidFill>
                 <a:latin typeface="Calibri"/>
               </a:rPr>
-              <a:t>AI reads the drawing</a:t>
+              <a:t>Rules fill the form</a:t>
             </a:r>
           </a:p>
         </p:txBody>
@@ -43911,7 +43892,7 @@
                 </a:solidFill>
                 <a:latin typeface="Calibri"/>
               </a:rPr>
-              <a:t>Tolerances, finish, coating, heat treatment</a:t>
+              <a:t>Fixed rules turn measurements into values</a:t>
             </a:r>
           </a:p>
         </p:txBody>
@@ -44199,7 +44180,7 @@
                 </a:solidFill>
                 <a:latin typeface="Calibri"/>
               </a:rPr>
-              <a:t>What was read is compared with the model</a:t>
+              <a:t>Contradictions are flagged or stop the cost</a:t>
             </a:r>
           </a:p>
         </p:txBody>
@@ -44487,7 +44468,7 @@
                 </a:solidFill>
                 <a:latin typeface="Calibri"/>
               </a:rPr>
-              <a:t>Only the things a 3D model cannot show</a:t>
+              <a:t>Material, tolerance, finish, heat treatment</a:t>
             </a:r>
           </a:p>
         </p:txBody>
@@ -45845,7 +45826,7 @@
                 </a:solidFill>
                 <a:latin typeface="Calibri"/>
               </a:rPr>
-              <a:t>Provide a server</a:t>
+              <a:t>Provide a server or laptop</a:t>
             </a:r>
           </a:p>
         </p:txBody>
@@ -46392,7 +46373,7 @@
                 </a:solidFill>
                 <a:latin typeface="Calibri"/>
               </a:rPr>
-              <a:t>AI  COST  INTELLIGENCE</a:t>
+              <a:t>SHOULD-COST  ENGINEERING</a:t>
             </a:r>
           </a:p>
         </p:txBody>
@@ -46562,7 +46543,7 @@
                 </a:solidFill>
                 <a:latin typeface="Calibri"/>
               </a:rPr>
-              <a:t>Sizes counted straight out of the software this month. Both languages are in common use and JLR IT will have people who know them.</a:t>
+              <a:t>Sizes counted in the source files on 28 September 2026, rounded. Both languages are in common use and JLR IT will have people who know them.</a:t>
             </a:r>
           </a:p>
         </p:txBody>
@@ -47170,7 +47151,7 @@
                 </a:solidFill>
                 <a:latin typeface="Calibri"/>
               </a:rPr>
-              <a:t>2,462 lines</a:t>
+              <a:t>about 2,500 lines</a:t>
             </a:r>
           </a:p>
         </p:txBody>
@@ -47346,7 +47327,7 @@
                 </a:solidFill>
                 <a:latin typeface="Calibri"/>
               </a:rPr>
-              <a:t>Reading the drawing</a:t>
+              <a:t>Rules that fill the form</a:t>
             </a:r>
           </a:p>
         </p:txBody>
@@ -47522,7 +47503,7 @@
                 </a:solidFill>
                 <a:latin typeface="Calibri"/>
               </a:rPr>
-              <a:t>830 lines</a:t>
+              <a:t>about 8,900 lines</a:t>
             </a:r>
           </a:p>
         </p:txBody>
@@ -47610,7 +47591,7 @@
                 </a:solidFill>
                 <a:latin typeface="Calibri"/>
               </a:rPr>
-              <a:t>Sends the drawing to the AI and sorts out what comes back.</a:t>
+              <a:t>Turn measurements into cost inputs and decide what the engineer is asked.</a:t>
             </a:r>
           </a:p>
         </p:txBody>
@@ -47698,7 +47679,7 @@
                 </a:solidFill>
                 <a:latin typeface="Calibri"/>
               </a:rPr>
-              <a:t>Safety checks</a:t>
+              <a:t>Geometry checks</a:t>
             </a:r>
           </a:p>
         </p:txBody>
@@ -47874,7 +47855,7 @@
                 </a:solidFill>
                 <a:latin typeface="Calibri"/>
               </a:rPr>
-              <a:t>536 lines</a:t>
+              <a:t>about 400 lines</a:t>
             </a:r>
           </a:p>
         </p:txBody>
@@ -47962,7 +47943,7 @@
                 </a:solidFill>
                 <a:latin typeface="Calibri"/>
               </a:rPr>
-              <a:t>The four checks on the next slide, in three files.</a:t>
+              <a:t>The checks on the next slide.</a:t>
             </a:r>
           </a:p>
         </p:txBody>
@@ -48050,7 +48031,7 @@
                 </a:solidFill>
                 <a:latin typeface="Calibri"/>
               </a:rPr>
-              <a:t>Questions per part type</a:t>
+              <a:t>Bulk run</a:t>
             </a:r>
           </a:p>
         </p:txBody>
@@ -48226,7 +48207,7 @@
                 </a:solidFill>
                 <a:latin typeface="Calibri"/>
               </a:rPr>
-              <a:t>8,509 lines</a:t>
+              <a:t>about 850 lines</a:t>
             </a:r>
           </a:p>
         </p:txBody>
@@ -48314,7 +48295,7 @@
                 </a:solidFill>
                 <a:latin typeface="Calibri"/>
               </a:rPr>
-              <a:t>165 costing rules that fill the form and decide what the engineer gets asked.</a:t>
+              <a:t>A parts list in; results, open questions and a run record out. Option 2.</a:t>
             </a:r>
           </a:p>
         </p:txBody>
@@ -48402,7 +48383,7 @@
                 </a:solidFill>
                 <a:latin typeface="Calibri"/>
               </a:rPr>
-              <a:t>Design-for-cost findings</a:t>
+              <a:t>Settings list</a:t>
             </a:r>
           </a:p>
         </p:txBody>
@@ -48490,7 +48471,7 @@
                 </a:solidFill>
                 <a:latin typeface="Calibri"/>
               </a:rPr>
-              <a:t>TypeScript</a:t>
+              <a:t>Plain list</a:t>
             </a:r>
           </a:p>
         </p:txBody>
@@ -48578,7 +48559,7 @@
                 </a:solidFill>
                 <a:latin typeface="Calibri"/>
               </a:rPr>
-              <a:t>1,992 lines</a:t>
+              <a:t>to be written</a:t>
             </a:r>
           </a:p>
         </p:txBody>
@@ -48666,7 +48647,7 @@
                 </a:solidFill>
                 <a:latin typeface="Calibri"/>
               </a:rPr>
-              <a:t>Flags features that are expensive to make and says why.</a:t>
+              <a:t>Every fixed number pulled together in one place. Slide 9.</a:t>
             </a:r>
           </a:p>
         </p:txBody>
@@ -48754,7 +48735,7 @@
                 </a:solidFill>
                 <a:latin typeface="Calibri"/>
               </a:rPr>
-              <a:t>Settings list</a:t>
+              <a:t>JLR Rate Converter</a:t>
             </a:r>
           </a:p>
         </p:txBody>
@@ -48842,7 +48823,7 @@
                 </a:solidFill>
                 <a:latin typeface="Calibri"/>
               </a:rPr>
-              <a:t>Plain list</a:t>
+              <a:t>Excel</a:t>
             </a:r>
           </a:p>
         </p:txBody>
@@ -48930,7 +48911,7 @@
                 </a:solidFill>
                 <a:latin typeface="Calibri"/>
               </a:rPr>
-              <a:t>one file</a:t>
+              <a:t>no macros</a:t>
             </a:r>
           </a:p>
         </p:txBody>
@@ -49018,7 +48999,7 @@
                 </a:solidFill>
                 <a:latin typeface="Calibri"/>
               </a:rPr>
-              <a:t>Every fixed number pulled together in one place. Slide 9.</a:t>
+              <a:t>Turns JLR's own rate card into the tool's format.</a:t>
             </a:r>
           </a:p>
         </p:txBody>
@@ -49366,7 +49347,7 @@
                 </a:solidFill>
                 <a:latin typeface="Calibri"/>
               </a:rPr>
-              <a:t>The measuring engine needs a normal Linux server, not the cut-down kind used for small services. It decides where this can go, so it is worth settling early.</a:t>
+              <a:t>The measuring engine runs on a standard Linux server or from our Windows package. The cut-down Linux kind used for small services cannot run it.</a:t>
             </a:r>
           </a:p>
         </p:txBody>
@@ -49567,7 +49548,7 @@
                 </a:solidFill>
                 <a:latin typeface="Calibri"/>
               </a:rPr>
-              <a:t>AI  COST  INTELLIGENCE</a:t>
+              <a:t>SHOULD-COST  ENGINEERING</a:t>
             </a:r>
           </a:p>
         </p:txBody>
@@ -49737,7 +49718,7 @@
                 </a:solidFill>
                 <a:latin typeface="Calibri"/>
               </a:rPr>
-              <a:t>The AI does not set a price. It does hand over numbers that feed into one, so a bad reading turns into a bad cost. These four checks are what stop that, and they have to come across with everything else.</a:t>
+              <a:t>The price is always plain arithmetic. But a wrong input still gives a wrong cost. These four checks stop that, and they have to come across with everything else.</a:t>
             </a:r>
           </a:p>
         </p:txBody>
@@ -49939,7 +49920,7 @@
                 </a:solidFill>
                 <a:latin typeface="Calibri"/>
               </a:rPr>
-              <a:t>The measured model beats the AI</a:t>
+              <a:t>The measured model is the ground truth</a:t>
             </a:r>
           </a:p>
         </p:txBody>
@@ -49981,7 +49962,7 @@
                 </a:solidFill>
                 <a:latin typeface="Calibri"/>
               </a:rPr>
-              <a:t>If the AI reads 2 kg off the drawing and the model measures 1.4 kg, we use the measured figure. A disagreement the other way is flagged to the engineer, and a gap of more than half stops the costing until someone accepts it.</a:t>
+              <a:t>Weight and size come from the model. Any figure fed to the cost that contradicts them is flagged. A weight gap of more than half stops the costing until an engineer accepts it.</a:t>
             </a:r>
           </a:p>
         </p:txBody>
@@ -50183,7 +50164,7 @@
                 </a:solidFill>
                 <a:latin typeface="Calibri"/>
               </a:rPr>
-              <a:t>Everything read gets cross-checked</a:t>
+              <a:t>The route has to fit the shape</a:t>
             </a:r>
           </a:p>
         </p:txBody>
@@ -50225,7 +50206,7 @@
                 </a:solidFill>
                 <a:latin typeface="Calibri"/>
               </a:rPr>
-              <a:t>Numbers taken off the drawing get compared against the measured model. Where they disagree, the engineer is told and has to accept it by name before the cost stands.</a:t>
+              <a:t>A thick-walled part, walls over about 6 mm, is offered casting, forging, cast and machine, or machining. Never sheet metal or moulding.</a:t>
             </a:r>
           </a:p>
         </p:txBody>
@@ -50713,7 +50694,7 @@
                 </a:solidFill>
                 <a:latin typeface="Calibri"/>
               </a:rPr>
-              <a:t>Heat treatment, tolerance class and material grade cannot be read off a solid model, so the engineer is asked. The AI suggestion is labelled as a suggestion and never comes pre-ticked.</a:t>
+              <a:t>Material family, heat treatment and tolerance class cannot be read off a solid model, so the engineer is asked. A machined STL is blocked until someone types the cycle time.</a:t>
             </a:r>
           </a:p>
         </p:txBody>
@@ -50845,7 +50826,7 @@
                 </a:solidFill>
                 <a:latin typeface="Calibri"/>
               </a:rPr>
-              <a:t>Two things we found in our own review, and fixed</a:t>
+              <a:t>Why we test on real parts, not only test blocks</a:t>
             </a:r>
           </a:p>
         </p:txBody>
@@ -50887,7 +50868,7 @@
                 </a:solidFill>
                 <a:latin typeface="Calibri"/>
               </a:rPr>
-              <a:t>A route through the tool had no checks on it and returned a cost of "not a number" while reporting success. And a part exported as surfaces rather than a solid was costed at a plausible but wrong weight. Both now stop the costing instead of producing a figure.</a:t>
+              <a:t>A steering knuckle once costed at £5.43 while every test passed. Six real production parts are now pinned, and a change that moves any of them fails the build.</a:t>
             </a:r>
           </a:p>
         </p:txBody>
@@ -51088,7 +51069,7 @@
                 </a:solidFill>
                 <a:latin typeface="Calibri"/>
               </a:rPr>
-              <a:t>AI  COST  INTELLIGENCE</a:t>
+              <a:t>SHOULD-COST  ENGINEERING</a:t>
             </a:r>
           </a:p>
         </p:txBody>

--- a/CostVision-CAPEE-Implementation-Options.pptx
+++ b/CostVision-CAPEE-Implementation-Options.pptx
@@ -35948,7 +35948,7 @@
                 </a:solidFill>
                 <a:latin typeface="Calibri"/>
               </a:rPr>
-              <a:t>Reference machined bracket, £23.27, pinned in an automated test</a:t>
+              <a:t>Reference machined bracket, £24.34, pinned in an automated test</a:t>
             </a:r>
           </a:p>
         </p:txBody>

--- a/CostVision-CAPEE-Implementation-Options.pptx
+++ b/CostVision-CAPEE-Implementation-Options.pptx
@@ -525,7 +525,7 @@
           <a:lstStyle/>
           <a:p>
             <a:r>
-              <a:t>Thank you for the time. I want to walk you through two ways a tool we have built, CostVision, could work with CAPEE, and ask for a decision on the first one. The first option is simple. CAPEE keeps doing the costing. CostVision measures the 3D model and fills in the numbers CAPEE needs, and we prove that on our own parts. The second option comes later. It is costing a whole basket of parts in one run, unattended. Neither option needs AI. In the build we have given JLR, AI is switched off. I will be straight about what the tool does today and what it does not. The biggest gap is that it has never been checked against a price JLR actually paid. There are also no dates in this pack. Nobody has sized this work yet, so any timeline I showed you would be made up. What I can show is the order the work has to happen in.</a:t>
+              <a:t>Thank you for the time. I want to walk you through two ways a tool we have built, CostVision, could work with CAPEE, and ask for a decision on the first one. The first option is simple. CAPEE keeps doing the costing. CostVision measures the 3D model and fills in the numbers CAPEE needs, and we prove that on our own parts. The second option comes later. It is costing a whole basket of parts in one run, unattended. Neither option needs AI. In the build we have given JLR, there is no API key yet. I will be straight about what the tool does today and what it does not. The biggest gap is that it has never been checked against a price JLR actually paid. There are also no dates in this pack. Nobody has sized this work yet, so any timeline I showed you would be made up. What I can show is the order the work has to happen in.</a:t>
             </a:r>
           </a:p>
         </p:txBody>
@@ -1225,7 +1225,7 @@
           <a:lstStyle/>
           <a:p>
             <a:r>
-              <a:t>Eight items. The top one is the one that would stop me putting this in front of a supplier today, and approving the trial is what fixes it. The second is waiting on IT. The third is new. The software gap on records is closed, but JLR audit has not looked at them, so we should ask them early. The fourth matters more than it looks. Until our own rate card is loaded, every cost uses the built-in rates from June, and those are not our rates. The sixth is about AI, because it always comes up. AI is off in the build we gave JLR, nothing is sent out, and neither option needs it. But turning it on is only a setting, so someone should own that switch. The last row is worth saying plainly. The tool is still being worked on, so for any trial we pin one version and stay on it.</a:t>
+              <a:t>Eight items. The top one is the one that would stop me putting this in front of a supplier today, and approving the trial is what fixes it. The second is waiting on IT. The third is new. The software gap on records is closed, but JLR audit has not looked at them, so we should ask them early. The fourth matters more than it looks. Until our own rate card is loaded, every cost uses the built-in rates from June, and those are not our rates. The sixth is about AI, because it always comes up. There is no API key in the build we gave JLR, nothing is sent out, and neither option needs it. But turning it on is only a setting, so someone should own that switch. The last row is worth saying plainly. The tool is still being worked on, so for any trial we pin one version and stay on it.</a:t>
             </a:r>
           </a:p>
         </p:txBody>
@@ -1435,7 +1435,7 @@
           <a:lstStyle/>
           <a:p>
             <a:r>
-              <a:t>Keep this one for anyone who wants to know how we know. Every claim in the pack was checked against the software this week rather than assumed. A few are worth pointing at. The engine's arithmetic matches a hand calculation to under 0.01 percent on a reference part. That proves the sums are right. It does not prove the price is right. Six real production parts are pinned, so we notice if a change moves them. The measuring makes no internet connection, and the Windows package only listens on the laptop itself. That is the answer to the first question IT security will ask. AI is switched off in that build. The amber box is the one number I have deliberately left off every slide: accuracy against real prices. The tool can learn from actual prices once they are logged, but none from JLR are in it yet. That is why ask number one is what it is.</a:t>
+              <a:t>Keep this one for anyone who wants to know how we know. Every claim in the pack was checked against the software this week rather than assumed. A few are worth pointing at. The engine's arithmetic matches a hand calculation to under 0.01 percent on a reference part. That proves the sums are right. It does not prove the price is right. Six real production parts are pinned, so we notice if a change moves them. The measuring makes no internet connection, and the Windows package only listens on the laptop itself. That is the answer to the first question IT security will ask. There is no API key in that build. The amber box is the one number I have deliberately left off every slide: accuracy against real prices. The tool can learn from actual prices once they are logged, but none from JLR are in it yet. That is why ask number one is what it is.</a:t>
             </a:r>
           </a:p>
         </p:txBody>
@@ -1505,7 +1505,7 @@
           <a:lstStyle/>
           <a:p>
             <a:r>
-              <a:t>This is the problem we are trying to fix. Today an engineer opens the model, reads the drawing and types the numbers in. How many depends on the part. On CostVision's own forms it runs from about twelve values to about seventy. I have not counted CAPEE's screens, so take that as a guide. The time matters, but the second point matters more. Two engineers costing the same part will not type the same numbers. So we get two answers for one part and no way to say which is right. On the right is what the tool does. It measures the model. Fixed rules turn the measurements into the values the form needs. Where the shape cannot decide something, such as the material, it asks the engineer rather than guessing. The blue box is the point I would like people to hold on to. Measuring is ordinary geometry software, not AI. The AI is switched off in the JLR build. Everything on this slide works without it.</a:t>
+              <a:t>This is the problem we are trying to fix. Today an engineer opens the model, reads the drawing and types the numbers in. How many depends on the part. On CostVision's own forms it runs from about twelve values to about seventy. I have not counted CAPEE's screens, so take that as a guide. The time matters, but the second point matters more. Two engineers costing the same part will not type the same numbers. So we get two answers for one part and no way to say which is right. On the right is what the tool does. It measures the model. Fixed rules turn the measurements into the values the form needs. Where the shape cannot decide something, such as the material, it asks the engineer rather than guessing. The blue box is the point I would like people to hold on to. Measuring is ordinary geometry software, not AI. The JLR build has no API key yet. Everything on this slide works without it.</a:t>
             </a:r>
           </a:p>
         </p:txBody>
@@ -30203,7 +30203,7 @@
                 </a:solidFill>
                 <a:latin typeface="Calibri"/>
               </a:rPr>
-              <a:t>AI is off in the JLR build and neither option needs it. Turning it on is a setting, so it needs an owner and approval first.</a:t>
+              <a:t>The JLR build has no API key and neither option needs one. Adding a key turns AI on, so it needs an owner and approval first.</a:t>
             </a:r>
           </a:p>
         </p:txBody>
@@ -34406,7 +34406,7 @@
                 </a:solidFill>
                 <a:latin typeface="Calibri"/>
               </a:rPr>
-              <a:t>Neither option needs AI, and the JLR build has it switched off. If we want the AI features later, that is a separate approval.</a:t>
+              <a:t>Neither option needs AI, and the JLR build has no API key. If we want the AI features later, that is a separate approval.</a:t>
             </a:r>
           </a:p>
         </p:txBody>
@@ -36564,7 +36564,7 @@
                 </a:solidFill>
                 <a:latin typeface="Calibri"/>
               </a:rPr>
-              <a:t>AI is switched off in the JLR build</a:t>
+              <a:t>AI needs an API key in the JLR build</a:t>
             </a:r>
           </a:p>
         </p:txBody>
@@ -36652,7 +36652,7 @@
                 </a:solidFill>
                 <a:latin typeface="Calibri"/>
               </a:rPr>
-              <a:t>The package sets the no-AI switch; AI screens are hidden</a:t>
+              <a:t>No key in the package; AI screens are hidden until one is added</a:t>
             </a:r>
           </a:p>
         </p:txBody>
@@ -39257,7 +39257,7 @@
                 </a:solidFill>
                 <a:latin typeface="Calibri"/>
               </a:rPr>
-              <a:t>The 3D model is measured by software, the way a CMM measures a part. Fixed rules turn the measurements into cost inputs. AI is switched off in the JLR build. There is an optional AI mode that can read drawings, but it is off at JLR, and even when it is on it never sets a price.</a:t>
+              <a:t>The 3D model is measured by software, the way a CMM measures a part. Fixed rules turn the measurements into cost inputs. The JLR build has no API key yet. There is an optional AI mode that can read drawings, but it needs a key, and even when it is on it never sets a price.</a:t>
             </a:r>
           </a:p>
         </p:txBody>
@@ -40379,7 +40379,7 @@
                 </a:solidFill>
                 <a:latin typeface="Calibri"/>
               </a:rPr>
-              <a:t>AI features are off at JLR, by design</a:t>
+              <a:t>AI features need an API key; none added yet</a:t>
             </a:r>
           </a:p>
           <a:p>
